--- a/research/xu-huong-kiem-tien-youtube-tiktok-facebook.pptx
+++ b/research/xu-huong-kiem-tien-youtube-tiktok-facebook.pptx
@@ -19818,7 +19818,7 @@
         <p:spPr>
           <a:xfrm>
             <a:off x="914400" y="6534150"/>
-            <a:ext cx="4762500" cy="323850"/>
+            <a:ext cx="4762500" cy="609600"/>
           </a:xfrm>
           <a:prstGeom prst="rect">
             <a:avLst/>
@@ -19878,6 +19878,72 @@
               <a:t> USD</a:t>
             </a:r>
             <a:r>
+              <a:rPr lang="en-US" sz="1950" dirty="0" spc="-15" kern="0">
+                <a:solidFill>
+                  <a:srgbClr val="6B6A66"/>
+                </a:solidFill>
+                <a:latin typeface="Be Vietnam Pro" pitchFamily="34" charset="0"/>
+                <a:ea typeface="Be Vietnam Pro" pitchFamily="34" charset="-122"/>
+                <a:cs typeface="Be Vietnam Pro" pitchFamily="34" charset="-120"/>
+              </a:rPr>
+              <a:t> trên</a:t>
+            </a:r>
+            <a:r>
+              <a:rPr lang="en-US" sz="1950" dirty="0" spc="3" kern="0">
+                <a:solidFill>
+                  <a:srgbClr val="6B6A66"/>
+                </a:solidFill>
+                <a:latin typeface="Be Vietnam Pro" pitchFamily="34" charset="0"/>
+                <a:ea typeface="Be Vietnam Pro" pitchFamily="34" charset="-122"/>
+                <a:cs typeface="Be Vietnam Pro" pitchFamily="34" charset="-120"/>
+              </a:rPr>
+              <a:t> lượt</a:t>
+            </a:r>
+            <a:r>
+              <a:rPr lang="en-US" sz="1950" dirty="0" spc="-12" kern="0">
+                <a:solidFill>
+                  <a:srgbClr val="6B6A66"/>
+                </a:solidFill>
+                <a:latin typeface="Be Vietnam Pro" pitchFamily="34" charset="0"/>
+                <a:ea typeface="Be Vietnam Pro" pitchFamily="34" charset="-122"/>
+                <a:cs typeface="Be Vietnam Pro" pitchFamily="34" charset="-120"/>
+              </a:rPr>
+              <a:t> xem</a:t>
+            </a:r>
+            <a:r>
+              <a:rPr lang="en-US" sz="1950" dirty="0" spc="2" kern="0">
+                <a:solidFill>
+                  <a:srgbClr val="6B6A66"/>
+                </a:solidFill>
+                <a:latin typeface="Be Vietnam Pro" pitchFamily="34" charset="0"/>
+                <a:ea typeface="Be Vietnam Pro" pitchFamily="34" charset="-122"/>
+                <a:cs typeface="Be Vietnam Pro" pitchFamily="34" charset="-120"/>
+              </a:rPr>
+              <a:t> đủ</a:t>
+            </a:r>
+            <a:r>
+              <a:rPr lang="en-US" sz="1950" dirty="0" spc="17" kern="0">
+                <a:solidFill>
+                  <a:srgbClr val="6B6A66"/>
+                </a:solidFill>
+                <a:latin typeface="Be Vietnam Pro" pitchFamily="34" charset="0"/>
+                <a:ea typeface="Be Vietnam Pro" pitchFamily="34" charset="-122"/>
+                <a:cs typeface="Be Vietnam Pro" pitchFamily="34" charset="-120"/>
+              </a:rPr>
+              <a:t> điều</a:t>
+            </a:r>
+            <a:r>
+              <a:rPr lang="en-US" sz="1950" dirty="0" spc="0" kern="0">
+                <a:solidFill>
+                  <a:srgbClr val="6B6A66"/>
+                </a:solidFill>
+                <a:latin typeface="Be Vietnam Pro" pitchFamily="34" charset="0"/>
+                <a:ea typeface="Be Vietnam Pro" pitchFamily="34" charset="-122"/>
+                <a:cs typeface="Be Vietnam Pro" pitchFamily="34" charset="-120"/>
+              </a:rPr>
+              <a:t> kiện</a:t>
+            </a:r>
+            <a:r>
               <a:rPr lang="en-US" sz="1950" dirty="0" spc="-2" kern="0">
                 <a:solidFill>
                   <a:srgbClr val="6B6A66"/>
@@ -19886,10 +19952,21 @@
                 <a:ea typeface="Be Vietnam Pro" pitchFamily="34" charset="-122"/>
                 <a:cs typeface="Be Vietnam Pro" pitchFamily="34" charset="-120"/>
               </a:rPr>
-              <a:t> · 8</a:t>
-            </a:r>
-            <a:r>
-              <a:rPr lang="en-US" sz="1950" dirty="0" spc="5" kern="0">
+              <a:t> ·</a:t>
+            </a:r>
+            <a:r>
+              <a:rPr lang="en-US" sz="1950" dirty="0" spc="-1" kern="0">
+                <a:solidFill>
+                  <a:srgbClr val="6B6A66"/>
+                </a:solidFill>
+                <a:latin typeface="Be Vietnam Pro" pitchFamily="34" charset="0"/>
+                <a:ea typeface="Be Vietnam Pro" pitchFamily="34" charset="-122"/>
+                <a:cs typeface="Be Vietnam Pro" pitchFamily="34" charset="-120"/>
+              </a:rPr>
+              <a:t> 8</a:t>
+            </a:r>
+            <a:r>
+              <a:rPr lang="en-US" sz="1950" dirty="0" spc="4" kern="0">
                 <a:solidFill>
                   <a:srgbClr val="6B6A66"/>
                 </a:solidFill>
@@ -19933,7 +20010,7 @@
         </p:nvSpPr>
         <p:spPr>
           <a:xfrm>
-            <a:off x="914400" y="7219950"/>
+            <a:off x="914400" y="7391400"/>
             <a:ext cx="4762500" cy="381000"/>
           </a:xfrm>
           <a:prstGeom prst="rect">
@@ -19983,7 +20060,7 @@
         </p:nvSpPr>
         <p:spPr>
           <a:xfrm>
-            <a:off x="914400" y="7581900"/>
+            <a:off x="914400" y="7753350"/>
             <a:ext cx="4762500" cy="323850"/>
           </a:xfrm>
           <a:prstGeom prst="rect">
@@ -20055,7 +20132,7 @@
         </p:nvSpPr>
         <p:spPr>
           <a:xfrm>
-            <a:off x="6956107" y="7362825"/>
+            <a:off x="6956107" y="7534275"/>
             <a:ext cx="3493770" cy="323850"/>
           </a:xfrm>
           <a:prstGeom prst="roundRect">
@@ -21776,8 +21853,8 @@
         </p:nvSpPr>
         <p:spPr>
           <a:xfrm>
-            <a:off x="914400" y="8743950"/>
-            <a:ext cx="11239500" cy="323850"/>
+            <a:off x="914400" y="8705850"/>
+            <a:ext cx="16459200" cy="609600"/>
           </a:xfrm>
           <a:prstGeom prst="rect">
             <a:avLst/>
@@ -21837,6 +21914,138 @@
               <a:t> trang</a:t>
             </a:r>
             <a:r>
+              <a:rPr lang="en-US" sz="1800" dirty="0" spc="5" kern="0">
+                <a:solidFill>
+                  <a:srgbClr val="9AA0B5"/>
+                </a:solidFill>
+                <a:latin typeface="Be Vietnam Pro" pitchFamily="34" charset="0"/>
+                <a:ea typeface="Be Vietnam Pro" pitchFamily="34" charset="-122"/>
+                <a:cs typeface="Be Vietnam Pro" pitchFamily="34" charset="-120"/>
+              </a:rPr>
+              <a:t> trước.</a:t>
+            </a:r>
+            <a:r>
+              <a:rPr lang="en-US" sz="1800" dirty="0" spc="-21" kern="0">
+                <a:solidFill>
+                  <a:srgbClr val="9AA0B5"/>
+                </a:solidFill>
+                <a:latin typeface="Be Vietnam Pro" pitchFamily="34" charset="0"/>
+                <a:ea typeface="Be Vietnam Pro" pitchFamily="34" charset="-122"/>
+                <a:cs typeface="Be Vietnam Pro" pitchFamily="34" charset="-120"/>
+              </a:rPr>
+              <a:t> Với</a:t>
+            </a:r>
+            <a:r>
+              <a:rPr lang="en-US" sz="1800" dirty="0" spc="-28" kern="0">
+                <a:solidFill>
+                  <a:srgbClr val="9AA0B5"/>
+                </a:solidFill>
+                <a:latin typeface="Be Vietnam Pro" pitchFamily="34" charset="0"/>
+                <a:ea typeface="Be Vietnam Pro" pitchFamily="34" charset="-122"/>
+                <a:cs typeface="Be Vietnam Pro" pitchFamily="34" charset="-120"/>
+              </a:rPr>
+              <a:t> TikTok,</a:t>
+            </a:r>
+            <a:r>
+              <a:rPr lang="en-US" sz="1800" dirty="0" spc="-1" kern="0">
+                <a:solidFill>
+                  <a:srgbClr val="9AA0B5"/>
+                </a:solidFill>
+                <a:latin typeface="Be Vietnam Pro" pitchFamily="34" charset="0"/>
+                <a:ea typeface="Be Vietnam Pro" pitchFamily="34" charset="-122"/>
+                <a:cs typeface="Be Vietnam Pro" pitchFamily="34" charset="-120"/>
+              </a:rPr>
+              <a:t> RPM</a:t>
+            </a:r>
+            <a:r>
+              <a:rPr lang="en-US" sz="1800" dirty="0" spc="0" kern="0">
+                <a:solidFill>
+                  <a:srgbClr val="9AA0B5"/>
+                </a:solidFill>
+                <a:latin typeface="Be Vietnam Pro" pitchFamily="34" charset="0"/>
+                <a:ea typeface="Be Vietnam Pro" pitchFamily="34" charset="-122"/>
+                <a:cs typeface="Be Vietnam Pro" pitchFamily="34" charset="-120"/>
+              </a:rPr>
+              <a:t> áp</a:t>
+            </a:r>
+            <a:r>
+              <a:rPr lang="en-US" sz="1800" dirty="0" spc="-2" kern="0">
+                <a:solidFill>
+                  <a:srgbClr val="9AA0B5"/>
+                </a:solidFill>
+                <a:latin typeface="Be Vietnam Pro" pitchFamily="34" charset="0"/>
+                <a:ea typeface="Be Vietnam Pro" pitchFamily="34" charset="-122"/>
+                <a:cs typeface="Be Vietnam Pro" pitchFamily="34" charset="-120"/>
+              </a:rPr>
+              <a:t> dụng</a:t>
+            </a:r>
+            <a:r>
+              <a:rPr lang="en-US" sz="1800" dirty="0" spc="3" kern="0">
+                <a:solidFill>
+                  <a:srgbClr val="9AA0B5"/>
+                </a:solidFill>
+                <a:latin typeface="Be Vietnam Pro" pitchFamily="34" charset="0"/>
+                <a:ea typeface="Be Vietnam Pro" pitchFamily="34" charset="-122"/>
+                <a:cs typeface="Be Vietnam Pro" pitchFamily="34" charset="-120"/>
+              </a:rPr>
+              <a:t> cho</a:t>
+            </a:r>
+            <a:r>
+              <a:rPr lang="en-US" sz="1800" dirty="0" spc="-2" kern="0">
+                <a:solidFill>
+                  <a:srgbClr val="9AA0B5"/>
+                </a:solidFill>
+                <a:latin typeface="Be Vietnam Pro" pitchFamily="34" charset="0"/>
+                <a:ea typeface="Be Vietnam Pro" pitchFamily="34" charset="-122"/>
+                <a:cs typeface="Be Vietnam Pro" pitchFamily="34" charset="-120"/>
+              </a:rPr>
+              <a:t> khoảng</a:t>
+            </a:r>
+            <a:r>
+              <a:rPr lang="en-US" sz="1800" dirty="0" spc="2" kern="0">
+                <a:solidFill>
+                  <a:srgbClr val="9AA0B5"/>
+                </a:solidFill>
+                <a:latin typeface="Be Vietnam Pro" pitchFamily="34" charset="0"/>
+                <a:ea typeface="Be Vietnam Pro" pitchFamily="34" charset="-122"/>
+                <a:cs typeface="Be Vietnam Pro" pitchFamily="34" charset="-120"/>
+              </a:rPr>
+              <a:t> 40</a:t>
+            </a:r>
+            <a:r>
+              <a:rPr lang="en-US" sz="1800" dirty="0" spc="8" kern="0">
+                <a:solidFill>
+                  <a:srgbClr val="9AA0B5"/>
+                </a:solidFill>
+                <a:latin typeface="Be Vietnam Pro" pitchFamily="34" charset="0"/>
+                <a:ea typeface="Be Vietnam Pro" pitchFamily="34" charset="-122"/>
+                <a:cs typeface="Be Vietnam Pro" pitchFamily="34" charset="-120"/>
+              </a:rPr>
+              <a:t> đến</a:t>
+            </a:r>
+            <a:r>
+              <a:rPr lang="en-US" sz="1800" dirty="0" spc="-21" kern="0">
+                <a:solidFill>
+                  <a:srgbClr val="9AA0B5"/>
+                </a:solidFill>
+                <a:latin typeface="Be Vietnam Pro" pitchFamily="34" charset="0"/>
+                <a:ea typeface="Be Vietnam Pro" pitchFamily="34" charset="-122"/>
+                <a:cs typeface="Be Vietnam Pro" pitchFamily="34" charset="-120"/>
+              </a:rPr>
+              <a:t> 70%</a:t>
+            </a:r>
+            <a:r>
+              <a:rPr lang="en-US" sz="1800" dirty="0" spc="-11" kern="0">
+                <a:solidFill>
+                  <a:srgbClr val="9AA0B5"/>
+                </a:solidFill>
+                <a:latin typeface="Be Vietnam Pro" pitchFamily="34" charset="0"/>
+                <a:ea typeface="Be Vietnam Pro" pitchFamily="34" charset="-122"/>
+                <a:cs typeface="Be Vietnam Pro" pitchFamily="34" charset="-120"/>
+              </a:rPr>
+              <a:t> tổng</a:t>
+            </a:r>
+            <a:r>
               <a:rPr lang="en-US" sz="1800" dirty="0" spc="4" kern="0">
                 <a:solidFill>
                   <a:srgbClr val="9AA0B5"/>
@@ -21845,10 +22054,10 @@
                 <a:ea typeface="Be Vietnam Pro" pitchFamily="34" charset="-122"/>
                 <a:cs typeface="Be Vietnam Pro" pitchFamily="34" charset="-120"/>
               </a:rPr>
-              <a:t> trước;</a:t>
-            </a:r>
-            <a:r>
-              <a:rPr lang="en-US" sz="1800" dirty="0" spc="-32" kern="0">
+              <a:t> lượt</a:t>
+            </a:r>
+            <a:r>
+              <a:rPr lang="en-US" sz="1800" dirty="0" spc="-12" kern="0">
                 <a:solidFill>
                   <a:srgbClr val="9AA0B5"/>
                 </a:solidFill>
@@ -21856,10 +22065,10 @@
                 <a:ea typeface="Be Vietnam Pro" pitchFamily="34" charset="-122"/>
                 <a:cs typeface="Be Vietnam Pro" pitchFamily="34" charset="-120"/>
               </a:rPr>
-              <a:t> TikTok</a:t>
-            </a:r>
-            <a:r>
-              <a:rPr lang="en-US" sz="1800" dirty="0" spc="8" kern="0">
+              <a:t> xem</a:t>
+            </a:r>
+            <a:r>
+              <a:rPr lang="en-US" sz="1800" dirty="0" spc="3" kern="0">
                 <a:solidFill>
                   <a:srgbClr val="9AA0B5"/>
                 </a:solidFill>
@@ -21867,6 +22076,61 @@
                 <a:ea typeface="Be Vietnam Pro" pitchFamily="34" charset="-122"/>
                 <a:cs typeface="Be Vietnam Pro" pitchFamily="34" charset="-120"/>
               </a:rPr>
+              <a:t> (lượt</a:t>
+            </a:r>
+            <a:r>
+              <a:rPr lang="en-US" sz="1800" dirty="0" spc="-11" kern="0">
+                <a:solidFill>
+                  <a:srgbClr val="9AA0B5"/>
+                </a:solidFill>
+                <a:latin typeface="Be Vietnam Pro" pitchFamily="34" charset="0"/>
+                <a:ea typeface="Be Vietnam Pro" pitchFamily="34" charset="-122"/>
+                <a:cs typeface="Be Vietnam Pro" pitchFamily="34" charset="-120"/>
+              </a:rPr>
+              <a:t> xem</a:t>
+            </a:r>
+            <a:r>
+              <a:rPr lang="en-US" sz="1800" dirty="0" spc="2" kern="0">
+                <a:solidFill>
+                  <a:srgbClr val="9AA0B5"/>
+                </a:solidFill>
+                <a:latin typeface="Be Vietnam Pro" pitchFamily="34" charset="0"/>
+                <a:ea typeface="Be Vietnam Pro" pitchFamily="34" charset="-122"/>
+                <a:cs typeface="Be Vietnam Pro" pitchFamily="34" charset="-120"/>
+              </a:rPr>
+              <a:t> đủ</a:t>
+            </a:r>
+            <a:r>
+              <a:rPr lang="en-US" sz="1800" dirty="0" spc="13" kern="0">
+                <a:solidFill>
+                  <a:srgbClr val="9AA0B5"/>
+                </a:solidFill>
+                <a:latin typeface="Be Vietnam Pro" pitchFamily="34" charset="0"/>
+                <a:ea typeface="Be Vietnam Pro" pitchFamily="34" charset="-122"/>
+                <a:cs typeface="Be Vietnam Pro" pitchFamily="34" charset="-120"/>
+              </a:rPr>
+              <a:t> điều</a:t>
+            </a:r>
+            <a:r>
+              <a:rPr lang="en-US" sz="1800" dirty="0" spc="-1" kern="0">
+                <a:solidFill>
+                  <a:srgbClr val="9AA0B5"/>
+                </a:solidFill>
+                <a:latin typeface="Be Vietnam Pro" pitchFamily="34" charset="0"/>
+                <a:ea typeface="Be Vietnam Pro" pitchFamily="34" charset="-122"/>
+                <a:cs typeface="Be Vietnam Pro" pitchFamily="34" charset="-120"/>
+              </a:rPr>
+              <a:t> kiện);</a:t>
+            </a:r>
+            <a:r>
+              <a:rPr lang="en-US" sz="1800" dirty="0" spc="7" kern="0">
+                <a:solidFill>
+                  <a:srgbClr val="9AA0B5"/>
+                </a:solidFill>
+                <a:latin typeface="Be Vietnam Pro" pitchFamily="34" charset="0"/>
+                <a:ea typeface="Be Vietnam Pro" pitchFamily="34" charset="-122"/>
+                <a:cs typeface="Be Vietnam Pro" pitchFamily="34" charset="-120"/>
+              </a:rPr>
               <a:t> chưa</a:t>
             </a:r>
             <a:r>
@@ -21878,10 +22142,21 @@
                 <a:ea typeface="Be Vietnam Pro" pitchFamily="34" charset="-122"/>
                 <a:cs typeface="Be Vietnam Pro" pitchFamily="34" charset="-120"/>
               </a:rPr>
-              <a:t> tính Additional</a:t>
-            </a:r>
-            <a:r>
-              <a:rPr lang="en-US" sz="1800" dirty="0" spc="-27" kern="0">
+              <a:t> tính</a:t>
+            </a:r>
+            <a:r>
+              <a:rPr lang="en-US" sz="1800" dirty="0" spc="-4" kern="0">
+                <a:solidFill>
+                  <a:srgbClr val="9AA0B5"/>
+                </a:solidFill>
+                <a:latin typeface="Be Vietnam Pro" pitchFamily="34" charset="0"/>
+                <a:ea typeface="Be Vietnam Pro" pitchFamily="34" charset="-122"/>
+                <a:cs typeface="Be Vietnam Pro" pitchFamily="34" charset="-120"/>
+              </a:rPr>
+              <a:t> Additional</a:t>
+            </a:r>
+            <a:r>
+              <a:rPr lang="en-US" sz="1800" dirty="0" spc="-26" kern="0">
                 <a:solidFill>
                   <a:srgbClr val="9AA0B5"/>
                 </a:solidFill>

--- a/research/xu-huong-kiem-tien-youtube-tiktok-facebook.pptx
+++ b/research/xu-huong-kiem-tien-youtube-tiktok-facebook.pptx
@@ -2387,7 +2387,7 @@
         <p:spPr>
           <a:xfrm>
             <a:off x="914400" y="9715500"/>
-            <a:ext cx="9525000" cy="285750"/>
+            <a:ext cx="16459200" cy="285750"/>
           </a:xfrm>
           <a:prstGeom prst="rect">
             <a:avLst/>
@@ -2403,6 +2403,116 @@
               <a:buNone/>
             </a:pPr>
             <a:r>
+              <a:rPr lang="en-US" sz="1650" dirty="0" spc="0" kern="0">
+                <a:solidFill>
+                  <a:srgbClr val="9AA0B5"/>
+                </a:solidFill>
+                <a:latin typeface="Be Vietnam Pro" pitchFamily="34" charset="0"/>
+                <a:ea typeface="Be Vietnam Pro" pitchFamily="34" charset="-122"/>
+                <a:cs typeface="Be Vietnam Pro" pitchFamily="34" charset="-120"/>
+              </a:rPr>
+              <a:t>Báo cáo</a:t>
+            </a:r>
+            <a:r>
+              <a:rPr lang="en-US" sz="1650" dirty="0" spc="5" kern="0">
+                <a:solidFill>
+                  <a:srgbClr val="9AA0B5"/>
+                </a:solidFill>
+                <a:latin typeface="Be Vietnam Pro" pitchFamily="34" charset="0"/>
+                <a:ea typeface="Be Vietnam Pro" pitchFamily="34" charset="-122"/>
+                <a:cs typeface="Be Vietnam Pro" pitchFamily="34" charset="-120"/>
+              </a:rPr>
+              <a:t> đầy</a:t>
+            </a:r>
+            <a:r>
+              <a:rPr lang="en-US" sz="1650" dirty="0" spc="3" kern="0">
+                <a:solidFill>
+                  <a:srgbClr val="9AA0B5"/>
+                </a:solidFill>
+                <a:latin typeface="Be Vietnam Pro" pitchFamily="34" charset="0"/>
+                <a:ea typeface="Be Vietnam Pro" pitchFamily="34" charset="-122"/>
+                <a:cs typeface="Be Vietnam Pro" pitchFamily="34" charset="-120"/>
+              </a:rPr>
+              <a:t> đủ,</a:t>
+            </a:r>
+            <a:r>
+              <a:rPr lang="en-US" sz="1650" dirty="0" spc="-2" kern="0">
+                <a:solidFill>
+                  <a:srgbClr val="9AA0B5"/>
+                </a:solidFill>
+                <a:latin typeface="Be Vietnam Pro" pitchFamily="34" charset="0"/>
+                <a:ea typeface="Be Vietnam Pro" pitchFamily="34" charset="-122"/>
+                <a:cs typeface="Be Vietnam Pro" pitchFamily="34" charset="-120"/>
+              </a:rPr>
+              <a:t> nguồn</a:t>
+            </a:r>
+            <a:r>
+              <a:rPr lang="en-US" sz="1650" dirty="0" spc="-8" kern="0">
+                <a:solidFill>
+                  <a:srgbClr val="9AA0B5"/>
+                </a:solidFill>
+                <a:latin typeface="Be Vietnam Pro" pitchFamily="34" charset="0"/>
+                <a:ea typeface="Be Vietnam Pro" pitchFamily="34" charset="-122"/>
+                <a:cs typeface="Be Vietnam Pro" pitchFamily="34" charset="-120"/>
+              </a:rPr>
+              <a:t> và</a:t>
+            </a:r>
+            <a:r>
+              <a:rPr lang="en-US" sz="1650" dirty="0" spc="14" kern="0">
+                <a:solidFill>
+                  <a:srgbClr val="9AA0B5"/>
+                </a:solidFill>
+                <a:latin typeface="Be Vietnam Pro" pitchFamily="34" charset="0"/>
+                <a:ea typeface="Be Vietnam Pro" pitchFamily="34" charset="-122"/>
+                <a:cs typeface="Be Vietnam Pro" pitchFamily="34" charset="-120"/>
+              </a:rPr>
+              <a:t> độ</a:t>
+            </a:r>
+            <a:r>
+              <a:rPr lang="en-US" sz="1650" dirty="0" spc="1" kern="0">
+                <a:solidFill>
+                  <a:srgbClr val="9AA0B5"/>
+                </a:solidFill>
+                <a:latin typeface="Be Vietnam Pro" pitchFamily="34" charset="0"/>
+                <a:ea typeface="Be Vietnam Pro" pitchFamily="34" charset="-122"/>
+                <a:cs typeface="Be Vietnam Pro" pitchFamily="34" charset="-120"/>
+              </a:rPr>
+              <a:t> tin</a:t>
+            </a:r>
+            <a:r>
+              <a:rPr lang="en-US" sz="1650" dirty="0" spc="-5" kern="0">
+                <a:solidFill>
+                  <a:srgbClr val="9AA0B5"/>
+                </a:solidFill>
+                <a:latin typeface="Be Vietnam Pro" pitchFamily="34" charset="0"/>
+                <a:ea typeface="Be Vietnam Pro" pitchFamily="34" charset="-122"/>
+                <a:cs typeface="Be Vietnam Pro" pitchFamily="34" charset="-120"/>
+              </a:rPr>
+              <a:t> cậy</a:t>
+            </a:r>
+            <a:r>
+              <a:rPr lang="en-US" sz="1650" dirty="0" spc="15" kern="0">
+                <a:solidFill>
+                  <a:srgbClr val="9AA0B5"/>
+                </a:solidFill>
+                <a:latin typeface="Be Vietnam Pro" pitchFamily="34" charset="0"/>
+                <a:ea typeface="Be Vietnam Pro" pitchFamily="34" charset="-122"/>
+                <a:cs typeface="Be Vietnam Pro" pitchFamily="34" charset="-120"/>
+              </a:rPr>
+              <a:t> từng</a:t>
+            </a:r>
+            <a:r>
+              <a:rPr lang="en-US" sz="1650" dirty="0" spc="-4" kern="0">
+                <a:solidFill>
+                  <a:srgbClr val="9AA0B5"/>
+                </a:solidFill>
+                <a:latin typeface="Be Vietnam Pro" pitchFamily="34" charset="0"/>
+                <a:ea typeface="Be Vietnam Pro" pitchFamily="34" charset="-122"/>
+                <a:cs typeface="Be Vietnam Pro" pitchFamily="34" charset="-120"/>
+              </a:rPr>
+              <a:t> số</a:t>
+            </a:r>
+            <a:r>
               <a:rPr lang="en-US" sz="1650" dirty="0" spc="-1" kern="0">
                 <a:solidFill>
                   <a:srgbClr val="9AA0B5"/>
@@ -2411,10 +2521,10 @@
                 <a:ea typeface="Be Vietnam Pro" pitchFamily="34" charset="-122"/>
                 <a:cs typeface="Be Vietnam Pro" pitchFamily="34" charset="-120"/>
               </a:rPr>
-              <a:t>Bản</a:t>
-            </a:r>
-            <a:r>
-              <a:rPr lang="en-US" sz="1650" dirty="0" spc="3" kern="0">
+              <a:t> liệu:</a:t>
+            </a:r>
+            <a:r>
+              <a:rPr lang="en-US" sz="1650" dirty="0" spc="-6" kern="0">
                 <a:solidFill>
                   <a:srgbClr val="9AA0B5"/>
                 </a:solidFill>
@@ -2422,150 +2532,7 @@
                 <a:ea typeface="Be Vietnam Pro" pitchFamily="34" charset="-122"/>
                 <a:cs typeface="Be Vietnam Pro" pitchFamily="34" charset="-120"/>
               </a:rPr>
-              <a:t> 3</a:t>
-            </a:r>
-            <a:r>
-              <a:rPr lang="en-US" sz="1650" dirty="0" spc="0" kern="0">
-                <a:solidFill>
-                  <a:srgbClr val="9AA0B5"/>
-                </a:solidFill>
-                <a:latin typeface="Be Vietnam Pro" pitchFamily="34" charset="0"/>
-                <a:ea typeface="Be Vietnam Pro" pitchFamily="34" charset="-122"/>
-                <a:cs typeface="Be Vietnam Pro" pitchFamily="34" charset="-120"/>
-              </a:rPr>
-              <a:t> ·</a:t>
-            </a:r>
-            <a:r>
-              <a:rPr lang="en-US" sz="1650" dirty="0" spc="1" kern="0">
-                <a:solidFill>
-                  <a:srgbClr val="9AA0B5"/>
-                </a:solidFill>
-                <a:latin typeface="Be Vietnam Pro" pitchFamily="34" charset="0"/>
-                <a:ea typeface="Be Vietnam Pro" pitchFamily="34" charset="-122"/>
-                <a:cs typeface="Be Vietnam Pro" pitchFamily="34" charset="-120"/>
-              </a:rPr>
-              <a:t> mỗi</a:t>
-            </a:r>
-            <a:r>
-              <a:rPr lang="en-US" sz="1650" dirty="0" spc="-4" kern="0">
-                <a:solidFill>
-                  <a:srgbClr val="9AA0B5"/>
-                </a:solidFill>
-                <a:latin typeface="Be Vietnam Pro" pitchFamily="34" charset="0"/>
-                <a:ea typeface="Be Vietnam Pro" pitchFamily="34" charset="-122"/>
-                <a:cs typeface="Be Vietnam Pro" pitchFamily="34" charset="-120"/>
-              </a:rPr>
-              <a:t> số</a:t>
-            </a:r>
-            <a:r>
-              <a:rPr lang="en-US" sz="1650" dirty="0" spc="0" kern="0">
-                <a:solidFill>
-                  <a:srgbClr val="9AA0B5"/>
-                </a:solidFill>
-                <a:latin typeface="Be Vietnam Pro" pitchFamily="34" charset="0"/>
-                <a:ea typeface="Be Vietnam Pro" pitchFamily="34" charset="-122"/>
-                <a:cs typeface="Be Vietnam Pro" pitchFamily="34" charset="-120"/>
-              </a:rPr>
-              <a:t> liệu</a:t>
-            </a:r>
-            <a:r>
-              <a:rPr lang="en-US" sz="1650" dirty="0" spc="-8" kern="0">
-                <a:solidFill>
-                  <a:srgbClr val="9AA0B5"/>
-                </a:solidFill>
-                <a:latin typeface="Be Vietnam Pro" pitchFamily="34" charset="0"/>
-                <a:ea typeface="Be Vietnam Pro" pitchFamily="34" charset="-122"/>
-                <a:cs typeface="Be Vietnam Pro" pitchFamily="34" charset="-120"/>
-              </a:rPr>
-              <a:t> gắn</a:t>
-            </a:r>
-            <a:r>
-              <a:rPr lang="en-US" sz="1650" dirty="0" spc="14" kern="0">
-                <a:solidFill>
-                  <a:srgbClr val="9AA0B5"/>
-                </a:solidFill>
-                <a:latin typeface="Be Vietnam Pro" pitchFamily="34" charset="0"/>
-                <a:ea typeface="Be Vietnam Pro" pitchFamily="34" charset="-122"/>
-                <a:cs typeface="Be Vietnam Pro" pitchFamily="34" charset="-120"/>
-              </a:rPr>
-              <a:t> độ</a:t>
-            </a:r>
-            <a:r>
-              <a:rPr lang="en-US" sz="1650" dirty="0" spc="1" kern="0">
-                <a:solidFill>
-                  <a:srgbClr val="9AA0B5"/>
-                </a:solidFill>
-                <a:latin typeface="Be Vietnam Pro" pitchFamily="34" charset="0"/>
-                <a:ea typeface="Be Vietnam Pro" pitchFamily="34" charset="-122"/>
-                <a:cs typeface="Be Vietnam Pro" pitchFamily="34" charset="-120"/>
-              </a:rPr>
-              <a:t> tin</a:t>
-            </a:r>
-            <a:r>
-              <a:rPr lang="en-US" sz="1650" dirty="0" spc="-5" kern="0">
-                <a:solidFill>
-                  <a:srgbClr val="9AA0B5"/>
-                </a:solidFill>
-                <a:latin typeface="Be Vietnam Pro" pitchFamily="34" charset="0"/>
-                <a:ea typeface="Be Vietnam Pro" pitchFamily="34" charset="-122"/>
-                <a:cs typeface="Be Vietnam Pro" pitchFamily="34" charset="-120"/>
-              </a:rPr>
-              <a:t> cậy</a:t>
-            </a:r>
-            <a:r>
-              <a:rPr lang="en-US" sz="1650" dirty="0" spc="-11" kern="0">
-                <a:solidFill>
-                  <a:srgbClr val="9AA0B5"/>
-                </a:solidFill>
-                <a:latin typeface="Be Vietnam Pro" pitchFamily="34" charset="0"/>
-                <a:ea typeface="Be Vietnam Pro" pitchFamily="34" charset="-122"/>
-                <a:cs typeface="Be Vietnam Pro" pitchFamily="34" charset="-120"/>
-              </a:rPr>
-              <a:t> trong</a:t>
-            </a:r>
-            <a:r>
-              <a:rPr lang="en-US" sz="1650" dirty="0" spc="-1" kern="0">
-                <a:solidFill>
-                  <a:srgbClr val="9AA0B5"/>
-                </a:solidFill>
-                <a:latin typeface="Be Vietnam Pro" pitchFamily="34" charset="0"/>
-                <a:ea typeface="Be Vietnam Pro" pitchFamily="34" charset="-122"/>
-                <a:cs typeface="Be Vietnam Pro" pitchFamily="34" charset="-120"/>
-              </a:rPr>
-              <a:t> báo</a:t>
-            </a:r>
-            <a:r>
-              <a:rPr lang="en-US" sz="1650" dirty="0" spc="1" kern="0">
-                <a:solidFill>
-                  <a:srgbClr val="9AA0B5"/>
-                </a:solidFill>
-                <a:latin typeface="Be Vietnam Pro" pitchFamily="34" charset="0"/>
-                <a:ea typeface="Be Vietnam Pro" pitchFamily="34" charset="-122"/>
-                <a:cs typeface="Be Vietnam Pro" pitchFamily="34" charset="-120"/>
-              </a:rPr>
-              <a:t> cáo</a:t>
-            </a:r>
-            <a:r>
-              <a:rPr lang="en-US" sz="1650" dirty="0" spc="5" kern="0">
-                <a:solidFill>
-                  <a:srgbClr val="9AA0B5"/>
-                </a:solidFill>
-                <a:latin typeface="Be Vietnam Pro" pitchFamily="34" charset="0"/>
-                <a:ea typeface="Be Vietnam Pro" pitchFamily="34" charset="-122"/>
-                <a:cs typeface="Be Vietnam Pro" pitchFamily="34" charset="-120"/>
-              </a:rPr>
-              <a:t> đầy</a:t>
-            </a:r>
-            <a:r>
-              <a:rPr lang="en-US" sz="1650" dirty="0" spc="3" kern="0">
-                <a:solidFill>
-                  <a:srgbClr val="9AA0B5"/>
-                </a:solidFill>
-                <a:latin typeface="Be Vietnam Pro" pitchFamily="34" charset="0"/>
-                <a:ea typeface="Be Vietnam Pro" pitchFamily="34" charset="-122"/>
-                <a:cs typeface="Be Vietnam Pro" pitchFamily="34" charset="-120"/>
-              </a:rPr>
-              <a:t> đủ</a:t>
+              <a:t> research/xu-huong-kiem-tien-youtube-tiktok-facebook.md</a:t>
             </a:r>
             <a:endParaRPr lang="en-US" sz="1650" dirty="0"/>
           </a:p>
@@ -8198,6 +8165,61 @@
                 <a:cs typeface="Be Vietnam Pro" pitchFamily="34" charset="-120"/>
               </a:rPr>
               <a:t> THỨC</a:t>
+            </a:r>
+            <a:r>
+              <a:rPr lang="en-US" sz="1650" b="1" spc="230" kern="0" dirty="0">
+                <a:solidFill>
+                  <a:srgbClr val="F3EEE3"/>
+                </a:solidFill>
+                <a:latin typeface="Be Vietnam Pro" pitchFamily="34" charset="0"/>
+                <a:ea typeface="Be Vietnam Pro" pitchFamily="34" charset="-122"/>
+                <a:cs typeface="Be Vietnam Pro" pitchFamily="34" charset="-120"/>
+              </a:rPr>
+              <a:t> ·</a:t>
+            </a:r>
+            <a:r>
+              <a:rPr lang="en-US" sz="1650" b="1" spc="226" kern="0" dirty="0">
+                <a:solidFill>
+                  <a:srgbClr val="F3EEE3"/>
+                </a:solidFill>
+                <a:latin typeface="Be Vietnam Pro" pitchFamily="34" charset="0"/>
+                <a:ea typeface="Be Vietnam Pro" pitchFamily="34" charset="-122"/>
+                <a:cs typeface="Be Vietnam Pro" pitchFamily="34" charset="-120"/>
+              </a:rPr>
+              <a:t> CHI</a:t>
+            </a:r>
+            <a:r>
+              <a:rPr lang="en-US" sz="1650" b="1" spc="225" kern="0" dirty="0">
+                <a:solidFill>
+                  <a:srgbClr val="F3EEE3"/>
+                </a:solidFill>
+                <a:latin typeface="Be Vietnam Pro" pitchFamily="34" charset="0"/>
+                <a:ea typeface="Be Vietnam Pro" pitchFamily="34" charset="-122"/>
+                <a:cs typeface="Be Vietnam Pro" pitchFamily="34" charset="-120"/>
+              </a:rPr>
+              <a:t> TIẾT</a:t>
+            </a:r>
+            <a:r>
+              <a:rPr lang="en-US" sz="1650" b="1" spc="217" kern="0" dirty="0">
+                <a:solidFill>
+                  <a:srgbClr val="F3EEE3"/>
+                </a:solidFill>
+                <a:latin typeface="Be Vietnam Pro" pitchFamily="34" charset="0"/>
+                <a:ea typeface="Be Vietnam Pro" pitchFamily="34" charset="-122"/>
+                <a:cs typeface="Be Vietnam Pro" pitchFamily="34" charset="-120"/>
+              </a:rPr>
+              <a:t> TRONG</a:t>
+            </a:r>
+            <a:r>
+              <a:rPr lang="en-US" sz="1650" b="1" spc="219" kern="0" dirty="0">
+                <a:solidFill>
+                  <a:srgbClr val="F3EEE3"/>
+                </a:solidFill>
+                <a:latin typeface="Be Vietnam Pro" pitchFamily="34" charset="0"/>
+                <a:ea typeface="Be Vietnam Pro" pitchFamily="34" charset="-122"/>
+                <a:cs typeface="Be Vietnam Pro" pitchFamily="34" charset="-120"/>
+              </a:rPr>
+              <a:t> research/xu-huong-kiem-tien-youtube-tiktok-facebook.md</a:t>
             </a:r>
             <a:endParaRPr lang="en-US" sz="1650" dirty="0"/>
           </a:p>

--- a/research/xu-huong-kiem-tien-youtube-tiktok-facebook.pptx
+++ b/research/xu-huong-kiem-tien-youtube-tiktok-facebook.pptx
@@ -21673,7 +21673,7 @@
               <a:buNone/>
             </a:pPr>
             <a:r>
-              <a:rPr lang="en-US" sz="3450" dirty="0" spc="-3" kern="0">
+              <a:rPr lang="en-US" sz="3450" dirty="0" spc="-5" kern="0">
                 <a:solidFill>
                   <a:srgbClr val="3DD6A0"/>
                 </a:solidFill>
@@ -21681,7 +21681,7 @@
                 <a:ea typeface="Bricolage Grotesque ExtraBold" pitchFamily="34" charset="-122"/>
                 <a:cs typeface="Bricolage Grotesque ExtraBold" pitchFamily="34" charset="-120"/>
               </a:rPr>
-              <a:t>160</a:t>
+              <a:t>400</a:t>
             </a:r>
             <a:r>
               <a:rPr lang="en-US" sz="3450" dirty="0" spc="9" kern="0">
@@ -21695,7 +21695,7 @@
               <a:t> đến</a:t>
             </a:r>
             <a:r>
-              <a:rPr lang="en-US" sz="3450" dirty="0" spc="-13" kern="0">
+              <a:rPr lang="en-US" sz="3450" dirty="0" spc="-12" kern="0">
                 <a:solidFill>
                   <a:srgbClr val="3DD6A0"/>
                 </a:solidFill>
@@ -21703,7 +21703,7 @@
                 <a:ea typeface="Bricolage Grotesque ExtraBold" pitchFamily="34" charset="-122"/>
                 <a:cs typeface="Bricolage Grotesque ExtraBold" pitchFamily="34" charset="-120"/>
               </a:rPr>
-              <a:t> 700</a:t>
+              <a:t> 1.000</a:t>
             </a:r>
             <a:r>
               <a:rPr lang="en-US" sz="3450" dirty="0" spc="3" kern="0">
@@ -21947,7 +21947,7 @@
               <a:t> trước.</a:t>
             </a:r>
             <a:r>
-              <a:rPr lang="en-US" sz="1800" dirty="0" spc="-21" kern="0">
+              <a:rPr lang="en-US" sz="1800" dirty="0" spc="-27" kern="0">
                 <a:solidFill>
                   <a:srgbClr val="9AA0B5"/>
                 </a:solidFill>
@@ -21955,10 +21955,10 @@
                 <a:ea typeface="Be Vietnam Pro" pitchFamily="34" charset="-122"/>
                 <a:cs typeface="Be Vietnam Pro" pitchFamily="34" charset="-120"/>
               </a:rPr>
-              <a:t> Với</a:t>
-            </a:r>
-            <a:r>
-              <a:rPr lang="en-US" sz="1800" dirty="0" spc="-28" kern="0">
+              <a:t> TikTok:</a:t>
+            </a:r>
+            <a:r>
+              <a:rPr lang="en-US" sz="1800" dirty="0" spc="-3" kern="0">
                 <a:solidFill>
                   <a:srgbClr val="9AA0B5"/>
                 </a:solidFill>
@@ -21966,7 +21966,293 @@
                 <a:ea typeface="Be Vietnam Pro" pitchFamily="34" charset="-122"/>
                 <a:cs typeface="Be Vietnam Pro" pitchFamily="34" charset="-120"/>
               </a:rPr>
-              <a:t> TikTok,</a:t>
+              <a:t> tính</a:t>
+            </a:r>
+            <a:r>
+              <a:rPr lang="en-US" sz="1800" dirty="0" spc="2" kern="0">
+                <a:solidFill>
+                  <a:srgbClr val="9AA0B5"/>
+                </a:solidFill>
+                <a:latin typeface="Be Vietnam Pro" pitchFamily="34" charset="0"/>
+                <a:ea typeface="Be Vietnam Pro" pitchFamily="34" charset="-122"/>
+                <a:cs typeface="Be Vietnam Pro" pitchFamily="34" charset="-120"/>
+              </a:rPr>
+              <a:t> cho</a:t>
+            </a:r>
+            <a:r>
+              <a:rPr lang="en-US" sz="1800" dirty="0" spc="4" kern="0">
+                <a:solidFill>
+                  <a:srgbClr val="9AA0B5"/>
+                </a:solidFill>
+                <a:latin typeface="Be Vietnam Pro" pitchFamily="34" charset="0"/>
+                <a:ea typeface="Be Vietnam Pro" pitchFamily="34" charset="-122"/>
+                <a:cs typeface="Be Vietnam Pro" pitchFamily="34" charset="-120"/>
+              </a:rPr>
+              <a:t> 1</a:t>
+            </a:r>
+            <a:r>
+              <a:rPr lang="en-US" sz="1800" dirty="0" spc="5" kern="0">
+                <a:solidFill>
+                  <a:srgbClr val="9AA0B5"/>
+                </a:solidFill>
+                <a:latin typeface="Be Vietnam Pro" pitchFamily="34" charset="0"/>
+                <a:ea typeface="Be Vietnam Pro" pitchFamily="34" charset="-122"/>
+                <a:cs typeface="Be Vietnam Pro" pitchFamily="34" charset="-120"/>
+              </a:rPr>
+              <a:t> triệu</a:t>
+            </a:r>
+            <a:r>
+              <a:rPr lang="en-US" sz="1800" dirty="0" spc="4" kern="0">
+                <a:solidFill>
+                  <a:srgbClr val="9AA0B5"/>
+                </a:solidFill>
+                <a:latin typeface="Be Vietnam Pro" pitchFamily="34" charset="0"/>
+                <a:ea typeface="Be Vietnam Pro" pitchFamily="34" charset="-122"/>
+                <a:cs typeface="Be Vietnam Pro" pitchFamily="34" charset="-120"/>
+              </a:rPr>
+              <a:t> lượt</a:t>
+            </a:r>
+            <a:r>
+              <a:rPr lang="en-US" sz="1800" dirty="0" spc="-13" kern="0">
+                <a:solidFill>
+                  <a:srgbClr val="9AA0B5"/>
+                </a:solidFill>
+                <a:latin typeface="Be Vietnam Pro" pitchFamily="34" charset="0"/>
+                <a:ea typeface="Be Vietnam Pro" pitchFamily="34" charset="-122"/>
+                <a:cs typeface="Be Vietnam Pro" pitchFamily="34" charset="-120"/>
+              </a:rPr>
+              <a:t> xem</a:t>
+            </a:r>
+            <a:r>
+              <a:rPr lang="en-US" sz="1800" dirty="0" spc="3" kern="0">
+                <a:solidFill>
+                  <a:srgbClr val="9AA0B5"/>
+                </a:solidFill>
+                <a:latin typeface="Be Vietnam Pro" pitchFamily="34" charset="0"/>
+                <a:ea typeface="Be Vietnam Pro" pitchFamily="34" charset="-122"/>
+                <a:cs typeface="Be Vietnam Pro" pitchFamily="34" charset="-120"/>
+              </a:rPr>
+              <a:t> đủ</a:t>
+            </a:r>
+            <a:r>
+              <a:rPr lang="en-US" sz="1800" dirty="0" spc="13" kern="0">
+                <a:solidFill>
+                  <a:srgbClr val="9AA0B5"/>
+                </a:solidFill>
+                <a:latin typeface="Be Vietnam Pro" pitchFamily="34" charset="0"/>
+                <a:ea typeface="Be Vietnam Pro" pitchFamily="34" charset="-122"/>
+                <a:cs typeface="Be Vietnam Pro" pitchFamily="34" charset="-120"/>
+              </a:rPr>
+              <a:t> điều</a:t>
+            </a:r>
+            <a:r>
+              <a:rPr lang="en-US" sz="1800" dirty="0" spc="-2" kern="0">
+                <a:solidFill>
+                  <a:srgbClr val="9AA0B5"/>
+                </a:solidFill>
+                <a:latin typeface="Be Vietnam Pro" pitchFamily="34" charset="0"/>
+                <a:ea typeface="Be Vietnam Pro" pitchFamily="34" charset="-122"/>
+                <a:cs typeface="Be Vietnam Pro" pitchFamily="34" charset="-120"/>
+              </a:rPr>
+              <a:t> kiện;</a:t>
+            </a:r>
+            <a:r>
+              <a:rPr lang="en-US" sz="1800" dirty="0" spc="7" kern="0">
+                <a:solidFill>
+                  <a:srgbClr val="9AA0B5"/>
+                </a:solidFill>
+                <a:latin typeface="Be Vietnam Pro" pitchFamily="34" charset="0"/>
+                <a:ea typeface="Be Vietnam Pro" pitchFamily="34" charset="-122"/>
+                <a:cs typeface="Be Vietnam Pro" pitchFamily="34" charset="-120"/>
+              </a:rPr>
+              <a:t> chưa</a:t>
+            </a:r>
+            <a:r>
+              <a:rPr lang="en-US" sz="1800" dirty="0" spc="2" kern="0">
+                <a:solidFill>
+                  <a:srgbClr val="9AA0B5"/>
+                </a:solidFill>
+                <a:latin typeface="Be Vietnam Pro" pitchFamily="34" charset="0"/>
+                <a:ea typeface="Be Vietnam Pro" pitchFamily="34" charset="-122"/>
+                <a:cs typeface="Be Vietnam Pro" pitchFamily="34" charset="-120"/>
+              </a:rPr>
+              <a:t> có</a:t>
+            </a:r>
+            <a:r>
+              <a:rPr lang="en-US" sz="1800" dirty="0" spc="-6" kern="0">
+                <a:solidFill>
+                  <a:srgbClr val="9AA0B5"/>
+                </a:solidFill>
+                <a:latin typeface="Be Vietnam Pro" pitchFamily="34" charset="0"/>
+                <a:ea typeface="Be Vietnam Pro" pitchFamily="34" charset="-122"/>
+                <a:cs typeface="Be Vietnam Pro" pitchFamily="34" charset="-120"/>
+              </a:rPr>
+              <a:t> số</a:t>
+            </a:r>
+            <a:r>
+              <a:rPr lang="en-US" sz="1800" dirty="0" spc="-2" kern="0">
+                <a:solidFill>
+                  <a:srgbClr val="9AA0B5"/>
+                </a:solidFill>
+                <a:latin typeface="Be Vietnam Pro" pitchFamily="34" charset="0"/>
+                <a:ea typeface="Be Vietnam Pro" pitchFamily="34" charset="-122"/>
+                <a:cs typeface="Be Vietnam Pro" pitchFamily="34" charset="-120"/>
+              </a:rPr>
+              <a:t> liệu công</a:t>
+            </a:r>
+            <a:r>
+              <a:rPr lang="en-US" sz="1800" dirty="0" spc="-3" kern="0">
+                <a:solidFill>
+                  <a:srgbClr val="9AA0B5"/>
+                </a:solidFill>
+                <a:latin typeface="Be Vietnam Pro" pitchFamily="34" charset="0"/>
+                <a:ea typeface="Be Vietnam Pro" pitchFamily="34" charset="-122"/>
+                <a:cs typeface="Be Vietnam Pro" pitchFamily="34" charset="-120"/>
+              </a:rPr>
+              <a:t> bố</a:t>
+            </a:r>
+            <a:r>
+              <a:rPr lang="en-US" sz="1800" dirty="0" spc="-13" kern="0">
+                <a:solidFill>
+                  <a:srgbClr val="9AA0B5"/>
+                </a:solidFill>
+                <a:latin typeface="Be Vietnam Pro" pitchFamily="34" charset="0"/>
+                <a:ea typeface="Be Vietnam Pro" pitchFamily="34" charset="-122"/>
+                <a:cs typeface="Be Vietnam Pro" pitchFamily="34" charset="-120"/>
+              </a:rPr>
+              <a:t> về</a:t>
+            </a:r>
+            <a:r>
+              <a:rPr lang="en-US" sz="1800" dirty="0" spc="-7" kern="0">
+                <a:solidFill>
+                  <a:srgbClr val="9AA0B5"/>
+                </a:solidFill>
+                <a:latin typeface="Be Vietnam Pro" pitchFamily="34" charset="0"/>
+                <a:ea typeface="Be Vietnam Pro" pitchFamily="34" charset="-122"/>
+                <a:cs typeface="Be Vietnam Pro" pitchFamily="34" charset="-120"/>
+              </a:rPr>
+              <a:t> tỷ</a:t>
+            </a:r>
+            <a:r>
+              <a:rPr lang="en-US" sz="1800" dirty="0" spc="-2" kern="0">
+                <a:solidFill>
+                  <a:srgbClr val="9AA0B5"/>
+                </a:solidFill>
+                <a:latin typeface="Be Vietnam Pro" pitchFamily="34" charset="0"/>
+                <a:ea typeface="Be Vietnam Pro" pitchFamily="34" charset="-122"/>
+                <a:cs typeface="Be Vietnam Pro" pitchFamily="34" charset="-120"/>
+              </a:rPr>
+              <a:t> lệ</a:t>
+            </a:r>
+            <a:r>
+              <a:rPr lang="en-US" sz="1800" dirty="0" spc="4" kern="0">
+                <a:solidFill>
+                  <a:srgbClr val="9AA0B5"/>
+                </a:solidFill>
+                <a:latin typeface="Be Vietnam Pro" pitchFamily="34" charset="0"/>
+                <a:ea typeface="Be Vietnam Pro" pitchFamily="34" charset="-122"/>
+                <a:cs typeface="Be Vietnam Pro" pitchFamily="34" charset="-120"/>
+              </a:rPr>
+              <a:t> lượt</a:t>
+            </a:r>
+            <a:r>
+              <a:rPr lang="en-US" sz="1800" dirty="0" spc="2" kern="0">
+                <a:solidFill>
+                  <a:srgbClr val="9AA0B5"/>
+                </a:solidFill>
+                <a:latin typeface="Be Vietnam Pro" pitchFamily="34" charset="0"/>
+                <a:ea typeface="Be Vietnam Pro" pitchFamily="34" charset="-122"/>
+                <a:cs typeface="Be Vietnam Pro" pitchFamily="34" charset="-120"/>
+              </a:rPr>
+              <a:t> đủ</a:t>
+            </a:r>
+            <a:r>
+              <a:rPr lang="en-US" sz="1800" dirty="0" spc="13" kern="0">
+                <a:solidFill>
+                  <a:srgbClr val="9AA0B5"/>
+                </a:solidFill>
+                <a:latin typeface="Be Vietnam Pro" pitchFamily="34" charset="0"/>
+                <a:ea typeface="Be Vietnam Pro" pitchFamily="34" charset="-122"/>
+                <a:cs typeface="Be Vietnam Pro" pitchFamily="34" charset="-120"/>
+              </a:rPr>
+              <a:t> điều</a:t>
+            </a:r>
+            <a:r>
+              <a:rPr lang="en-US" sz="1800" dirty="0" spc="-2" kern="0">
+                <a:solidFill>
+                  <a:srgbClr val="9AA0B5"/>
+                </a:solidFill>
+                <a:latin typeface="Be Vietnam Pro" pitchFamily="34" charset="0"/>
+                <a:ea typeface="Be Vietnam Pro" pitchFamily="34" charset="-122"/>
+                <a:cs typeface="Be Vietnam Pro" pitchFamily="34" charset="-120"/>
+              </a:rPr>
+              <a:t> kiện,</a:t>
+            </a:r>
+            <a:r>
+              <a:rPr lang="en-US" sz="1800" dirty="0" spc="-4" kern="0">
+                <a:solidFill>
+                  <a:srgbClr val="9AA0B5"/>
+                </a:solidFill>
+                <a:latin typeface="Be Vietnam Pro" pitchFamily="34" charset="0"/>
+                <a:ea typeface="Be Vietnam Pro" pitchFamily="34" charset="-122"/>
+                <a:cs typeface="Be Vietnam Pro" pitchFamily="34" charset="-120"/>
+              </a:rPr>
+              <a:t> nên</a:t>
+            </a:r>
+            <a:r>
+              <a:rPr lang="en-US" sz="1800" dirty="0" spc="-5" kern="0">
+                <a:solidFill>
+                  <a:srgbClr val="9AA0B5"/>
+                </a:solidFill>
+                <a:latin typeface="Be Vietnam Pro" pitchFamily="34" charset="0"/>
+                <a:ea typeface="Be Vietnam Pro" pitchFamily="34" charset="-122"/>
+                <a:cs typeface="Be Vietnam Pro" pitchFamily="34" charset="-120"/>
+              </a:rPr>
+              <a:t> số</a:t>
+            </a:r>
+            <a:r>
+              <a:rPr lang="en-US" sz="1800" dirty="0" spc="6" kern="0">
+                <a:solidFill>
+                  <a:srgbClr val="9AA0B5"/>
+                </a:solidFill>
+                <a:latin typeface="Be Vietnam Pro" pitchFamily="34" charset="0"/>
+                <a:ea typeface="Be Vietnam Pro" pitchFamily="34" charset="-122"/>
+                <a:cs typeface="Be Vietnam Pro" pitchFamily="34" charset="-120"/>
+              </a:rPr>
+              <a:t> thực</a:t>
+            </a:r>
+            <a:r>
+              <a:rPr lang="en-US" sz="1800" dirty="0" spc="-15" kern="0">
+                <a:solidFill>
+                  <a:srgbClr val="9AA0B5"/>
+                </a:solidFill>
+                <a:latin typeface="Be Vietnam Pro" pitchFamily="34" charset="0"/>
+                <a:ea typeface="Be Vietnam Pro" pitchFamily="34" charset="-122"/>
+                <a:cs typeface="Be Vietnam Pro" pitchFamily="34" charset="-120"/>
+              </a:rPr>
+              <a:t> tế</a:t>
+            </a:r>
+            <a:r>
+              <a:rPr lang="en-US" sz="1800" dirty="0" spc="1" kern="0">
+                <a:solidFill>
+                  <a:srgbClr val="9AA0B5"/>
+                </a:solidFill>
+                <a:latin typeface="Be Vietnam Pro" pitchFamily="34" charset="0"/>
+                <a:ea typeface="Be Vietnam Pro" pitchFamily="34" charset="-122"/>
+                <a:cs typeface="Be Vietnam Pro" pitchFamily="34" charset="-120"/>
+              </a:rPr>
+              <a:t> có</a:t>
+            </a:r>
+            <a:r>
+              <a:rPr lang="en-US" sz="1800" dirty="0" spc="-2" kern="0">
+                <a:solidFill>
+                  <a:srgbClr val="9AA0B5"/>
+                </a:solidFill>
+                <a:latin typeface="Be Vietnam Pro" pitchFamily="34" charset="0"/>
+                <a:ea typeface="Be Vietnam Pro" pitchFamily="34" charset="-122"/>
+                <a:cs typeface="Be Vietnam Pro" pitchFamily="34" charset="-120"/>
+              </a:rPr>
+              <a:t> thể</a:t>
             </a:r>
             <a:r>
               <a:rPr lang="en-US" sz="1800" dirty="0" spc="-1" kern="0">
@@ -21977,10 +22263,10 @@
                 <a:ea typeface="Be Vietnam Pro" pitchFamily="34" charset="-122"/>
                 <a:cs typeface="Be Vietnam Pro" pitchFamily="34" charset="-120"/>
               </a:rPr>
-              <a:t> RPM</a:t>
-            </a:r>
-            <a:r>
-              <a:rPr lang="en-US" sz="1800" dirty="0" spc="0" kern="0">
+              <a:t> thấp</a:t>
+            </a:r>
+            <a:r>
+              <a:rPr lang="en-US" sz="1800" dirty="0" spc="1" kern="0">
                 <a:solidFill>
                   <a:srgbClr val="9AA0B5"/>
                 </a:solidFill>
@@ -21988,175 +22274,21 @@
                 <a:ea typeface="Be Vietnam Pro" pitchFamily="34" charset="-122"/>
                 <a:cs typeface="Be Vietnam Pro" pitchFamily="34" charset="-120"/>
               </a:rPr>
-              <a:t> áp</a:t>
+              <a:t> hơn.</a:t>
+            </a:r>
+            <a:r>
+              <a:rPr lang="en-US" sz="1800" dirty="0" spc="5" kern="0">
+                <a:solidFill>
+                  <a:srgbClr val="9AA0B5"/>
+                </a:solidFill>
+                <a:latin typeface="Be Vietnam Pro" pitchFamily="34" charset="0"/>
+                <a:ea typeface="Be Vietnam Pro" pitchFamily="34" charset="-122"/>
+                <a:cs typeface="Be Vietnam Pro" pitchFamily="34" charset="-120"/>
+              </a:rPr>
+              <a:t> Chưa</a:t>
             </a:r>
             <a:r>
               <a:rPr lang="en-US" sz="1800" dirty="0" spc="-2" kern="0">
-                <a:solidFill>
-                  <a:srgbClr val="9AA0B5"/>
-                </a:solidFill>
-                <a:latin typeface="Be Vietnam Pro" pitchFamily="34" charset="0"/>
-                <a:ea typeface="Be Vietnam Pro" pitchFamily="34" charset="-122"/>
-                <a:cs typeface="Be Vietnam Pro" pitchFamily="34" charset="-120"/>
-              </a:rPr>
-              <a:t> dụng</a:t>
-            </a:r>
-            <a:r>
-              <a:rPr lang="en-US" sz="1800" dirty="0" spc="3" kern="0">
-                <a:solidFill>
-                  <a:srgbClr val="9AA0B5"/>
-                </a:solidFill>
-                <a:latin typeface="Be Vietnam Pro" pitchFamily="34" charset="0"/>
-                <a:ea typeface="Be Vietnam Pro" pitchFamily="34" charset="-122"/>
-                <a:cs typeface="Be Vietnam Pro" pitchFamily="34" charset="-120"/>
-              </a:rPr>
-              <a:t> cho</a:t>
-            </a:r>
-            <a:r>
-              <a:rPr lang="en-US" sz="1800" dirty="0" spc="-2" kern="0">
-                <a:solidFill>
-                  <a:srgbClr val="9AA0B5"/>
-                </a:solidFill>
-                <a:latin typeface="Be Vietnam Pro" pitchFamily="34" charset="0"/>
-                <a:ea typeface="Be Vietnam Pro" pitchFamily="34" charset="-122"/>
-                <a:cs typeface="Be Vietnam Pro" pitchFamily="34" charset="-120"/>
-              </a:rPr>
-              <a:t> khoảng</a:t>
-            </a:r>
-            <a:r>
-              <a:rPr lang="en-US" sz="1800" dirty="0" spc="2" kern="0">
-                <a:solidFill>
-                  <a:srgbClr val="9AA0B5"/>
-                </a:solidFill>
-                <a:latin typeface="Be Vietnam Pro" pitchFamily="34" charset="0"/>
-                <a:ea typeface="Be Vietnam Pro" pitchFamily="34" charset="-122"/>
-                <a:cs typeface="Be Vietnam Pro" pitchFamily="34" charset="-120"/>
-              </a:rPr>
-              <a:t> 40</a:t>
-            </a:r>
-            <a:r>
-              <a:rPr lang="en-US" sz="1800" dirty="0" spc="8" kern="0">
-                <a:solidFill>
-                  <a:srgbClr val="9AA0B5"/>
-                </a:solidFill>
-                <a:latin typeface="Be Vietnam Pro" pitchFamily="34" charset="0"/>
-                <a:ea typeface="Be Vietnam Pro" pitchFamily="34" charset="-122"/>
-                <a:cs typeface="Be Vietnam Pro" pitchFamily="34" charset="-120"/>
-              </a:rPr>
-              <a:t> đến</a:t>
-            </a:r>
-            <a:r>
-              <a:rPr lang="en-US" sz="1800" dirty="0" spc="-21" kern="0">
-                <a:solidFill>
-                  <a:srgbClr val="9AA0B5"/>
-                </a:solidFill>
-                <a:latin typeface="Be Vietnam Pro" pitchFamily="34" charset="0"/>
-                <a:ea typeface="Be Vietnam Pro" pitchFamily="34" charset="-122"/>
-                <a:cs typeface="Be Vietnam Pro" pitchFamily="34" charset="-120"/>
-              </a:rPr>
-              <a:t> 70%</a:t>
-            </a:r>
-            <a:r>
-              <a:rPr lang="en-US" sz="1800" dirty="0" spc="-11" kern="0">
-                <a:solidFill>
-                  <a:srgbClr val="9AA0B5"/>
-                </a:solidFill>
-                <a:latin typeface="Be Vietnam Pro" pitchFamily="34" charset="0"/>
-                <a:ea typeface="Be Vietnam Pro" pitchFamily="34" charset="-122"/>
-                <a:cs typeface="Be Vietnam Pro" pitchFamily="34" charset="-120"/>
-              </a:rPr>
-              <a:t> tổng</a:t>
-            </a:r>
-            <a:r>
-              <a:rPr lang="en-US" sz="1800" dirty="0" spc="4" kern="0">
-                <a:solidFill>
-                  <a:srgbClr val="9AA0B5"/>
-                </a:solidFill>
-                <a:latin typeface="Be Vietnam Pro" pitchFamily="34" charset="0"/>
-                <a:ea typeface="Be Vietnam Pro" pitchFamily="34" charset="-122"/>
-                <a:cs typeface="Be Vietnam Pro" pitchFamily="34" charset="-120"/>
-              </a:rPr>
-              <a:t> lượt</a:t>
-            </a:r>
-            <a:r>
-              <a:rPr lang="en-US" sz="1800" dirty="0" spc="-12" kern="0">
-                <a:solidFill>
-                  <a:srgbClr val="9AA0B5"/>
-                </a:solidFill>
-                <a:latin typeface="Be Vietnam Pro" pitchFamily="34" charset="0"/>
-                <a:ea typeface="Be Vietnam Pro" pitchFamily="34" charset="-122"/>
-                <a:cs typeface="Be Vietnam Pro" pitchFamily="34" charset="-120"/>
-              </a:rPr>
-              <a:t> xem</a:t>
-            </a:r>
-            <a:r>
-              <a:rPr lang="en-US" sz="1800" dirty="0" spc="3" kern="0">
-                <a:solidFill>
-                  <a:srgbClr val="9AA0B5"/>
-                </a:solidFill>
-                <a:latin typeface="Be Vietnam Pro" pitchFamily="34" charset="0"/>
-                <a:ea typeface="Be Vietnam Pro" pitchFamily="34" charset="-122"/>
-                <a:cs typeface="Be Vietnam Pro" pitchFamily="34" charset="-120"/>
-              </a:rPr>
-              <a:t> (lượt</a:t>
-            </a:r>
-            <a:r>
-              <a:rPr lang="en-US" sz="1800" dirty="0" spc="-11" kern="0">
-                <a:solidFill>
-                  <a:srgbClr val="9AA0B5"/>
-                </a:solidFill>
-                <a:latin typeface="Be Vietnam Pro" pitchFamily="34" charset="0"/>
-                <a:ea typeface="Be Vietnam Pro" pitchFamily="34" charset="-122"/>
-                <a:cs typeface="Be Vietnam Pro" pitchFamily="34" charset="-120"/>
-              </a:rPr>
-              <a:t> xem</a:t>
-            </a:r>
-            <a:r>
-              <a:rPr lang="en-US" sz="1800" dirty="0" spc="2" kern="0">
-                <a:solidFill>
-                  <a:srgbClr val="9AA0B5"/>
-                </a:solidFill>
-                <a:latin typeface="Be Vietnam Pro" pitchFamily="34" charset="0"/>
-                <a:ea typeface="Be Vietnam Pro" pitchFamily="34" charset="-122"/>
-                <a:cs typeface="Be Vietnam Pro" pitchFamily="34" charset="-120"/>
-              </a:rPr>
-              <a:t> đủ</a:t>
-            </a:r>
-            <a:r>
-              <a:rPr lang="en-US" sz="1800" dirty="0" spc="13" kern="0">
-                <a:solidFill>
-                  <a:srgbClr val="9AA0B5"/>
-                </a:solidFill>
-                <a:latin typeface="Be Vietnam Pro" pitchFamily="34" charset="0"/>
-                <a:ea typeface="Be Vietnam Pro" pitchFamily="34" charset="-122"/>
-                <a:cs typeface="Be Vietnam Pro" pitchFamily="34" charset="-120"/>
-              </a:rPr>
-              <a:t> điều</a:t>
-            </a:r>
-            <a:r>
-              <a:rPr lang="en-US" sz="1800" dirty="0" spc="-1" kern="0">
-                <a:solidFill>
-                  <a:srgbClr val="9AA0B5"/>
-                </a:solidFill>
-                <a:latin typeface="Be Vietnam Pro" pitchFamily="34" charset="0"/>
-                <a:ea typeface="Be Vietnam Pro" pitchFamily="34" charset="-122"/>
-                <a:cs typeface="Be Vietnam Pro" pitchFamily="34" charset="-120"/>
-              </a:rPr>
-              <a:t> kiện);</a:t>
-            </a:r>
-            <a:r>
-              <a:rPr lang="en-US" sz="1800" dirty="0" spc="7" kern="0">
-                <a:solidFill>
-                  <a:srgbClr val="9AA0B5"/>
-                </a:solidFill>
-                <a:latin typeface="Be Vietnam Pro" pitchFamily="34" charset="0"/>
-                <a:ea typeface="Be Vietnam Pro" pitchFamily="34" charset="-122"/>
-                <a:cs typeface="Be Vietnam Pro" pitchFamily="34" charset="-120"/>
-              </a:rPr>
-              <a:t> chưa</a:t>
-            </a:r>
-            <a:r>
-              <a:rPr lang="en-US" sz="1800" dirty="0" spc="-3" kern="0">
                 <a:solidFill>
                   <a:srgbClr val="9AA0B5"/>
                 </a:solidFill>

--- a/research/xu-huong-kiem-tien-youtube-tiktok-facebook.pptx
+++ b/research/xu-huong-kiem-tien-youtube-tiktok-facebook.pptx
@@ -12540,7 +12540,222 @@
       </p:sp>
       <p:sp>
         <p:nvSpPr>
-          <p:cNvPr id="33" name="Shape 31"/>
+          <p:cNvPr id="33" name="Text 31"/>
+          <p:cNvSpPr/>
+          <p:nvPr/>
+        </p:nvSpPr>
+        <p:spPr>
+          <a:xfrm>
+            <a:off x="914400" y="3505200"/>
+            <a:ext cx="16459200" cy="323850"/>
+          </a:xfrm>
+          <a:prstGeom prst="rect">
+            <a:avLst/>
+          </a:prstGeom>
+          <a:noFill/>
+          <a:ln/>
+        </p:spPr>
+        <p:txBody>
+          <a:bodyPr wrap="square" lIns="0" tIns="0" rIns="0" bIns="0" rtlCol="0" anchor="t"/>
+          <a:lstStyle/>
+          <a:p>
+            <a:pPr algn="l" indent="0" marL="0">
+              <a:buNone/>
+            </a:pPr>
+            <a:r>
+              <a:rPr lang="en-US" sz="1800" dirty="0" spc="-2" kern="0">
+                <a:solidFill>
+                  <a:srgbClr val="6B6A66"/>
+                </a:solidFill>
+                <a:latin typeface="Be Vietnam Pro" pitchFamily="34" charset="0"/>
+                <a:ea typeface="Be Vietnam Pro" pitchFamily="34" charset="-122"/>
+                <a:cs typeface="Be Vietnam Pro" pitchFamily="34" charset="-120"/>
+              </a:rPr>
+              <a:t>Mô hình</a:t>
+            </a:r>
+            <a:r>
+              <a:rPr lang="en-US" sz="1800" dirty="0" spc="0" kern="0">
+                <a:solidFill>
+                  <a:srgbClr val="6B6A66"/>
+                </a:solidFill>
+                <a:latin typeface="Be Vietnam Pro" pitchFamily="34" charset="0"/>
+                <a:ea typeface="Be Vietnam Pro" pitchFamily="34" charset="-122"/>
+                <a:cs typeface="Be Vietnam Pro" pitchFamily="34" charset="-120"/>
+              </a:rPr>
+              <a:t> phổ</a:t>
+            </a:r>
+            <a:r>
+              <a:rPr lang="en-US" sz="1800" dirty="0" spc="-2" kern="0">
+                <a:solidFill>
+                  <a:srgbClr val="6B6A66"/>
+                </a:solidFill>
+                <a:latin typeface="Be Vietnam Pro" pitchFamily="34" charset="0"/>
+                <a:ea typeface="Be Vietnam Pro" pitchFamily="34" charset="-122"/>
+                <a:cs typeface="Be Vietnam Pro" pitchFamily="34" charset="-120"/>
+              </a:rPr>
+              <a:t> biến</a:t>
+            </a:r>
+            <a:r>
+              <a:rPr lang="en-US" sz="1800" dirty="0" spc="-1" kern="0">
+                <a:solidFill>
+                  <a:srgbClr val="6B6A66"/>
+                </a:solidFill>
+                <a:latin typeface="Be Vietnam Pro" pitchFamily="34" charset="0"/>
+                <a:ea typeface="Be Vietnam Pro" pitchFamily="34" charset="-122"/>
+                <a:cs typeface="Be Vietnam Pro" pitchFamily="34" charset="-120"/>
+              </a:rPr>
+              <a:t> theo</a:t>
+            </a:r>
+            <a:r>
+              <a:rPr lang="en-US" sz="1800" dirty="0" spc="-4" kern="0">
+                <a:solidFill>
+                  <a:srgbClr val="6B6A66"/>
+                </a:solidFill>
+                <a:latin typeface="Be Vietnam Pro" pitchFamily="34" charset="0"/>
+                <a:ea typeface="Be Vietnam Pro" pitchFamily="34" charset="-122"/>
+                <a:cs typeface="Be Vietnam Pro" pitchFamily="34" charset="-120"/>
+              </a:rPr>
+              <a:t> bên</a:t>
+            </a:r>
+            <a:r>
+              <a:rPr lang="en-US" sz="1800" dirty="0" spc="-1" kern="0">
+                <a:solidFill>
+                  <a:srgbClr val="6B6A66"/>
+                </a:solidFill>
+                <a:latin typeface="Be Vietnam Pro" pitchFamily="34" charset="0"/>
+                <a:ea typeface="Be Vietnam Pro" pitchFamily="34" charset="-122"/>
+                <a:cs typeface="Be Vietnam Pro" pitchFamily="34" charset="-120"/>
+              </a:rPr>
+              <a:t> thứ ba</a:t>
+            </a:r>
+            <a:r>
+              <a:rPr lang="en-US" sz="1800" dirty="0" spc="-12" kern="0">
+                <a:solidFill>
+                  <a:srgbClr val="6B6A66"/>
+                </a:solidFill>
+                <a:latin typeface="Be Vietnam Pro" pitchFamily="34" charset="0"/>
+                <a:ea typeface="Be Vietnam Pro" pitchFamily="34" charset="-122"/>
+                <a:cs typeface="Be Vietnam Pro" pitchFamily="34" charset="-120"/>
+              </a:rPr>
+              <a:t> và</a:t>
+            </a:r>
+            <a:r>
+              <a:rPr lang="en-US" sz="1800" dirty="0" spc="3" kern="0">
+                <a:solidFill>
+                  <a:srgbClr val="6B6A66"/>
+                </a:solidFill>
+                <a:latin typeface="Be Vietnam Pro" pitchFamily="34" charset="0"/>
+                <a:ea typeface="Be Vietnam Pro" pitchFamily="34" charset="-122"/>
+                <a:cs typeface="Be Vietnam Pro" pitchFamily="34" charset="-120"/>
+              </a:rPr>
+              <a:t> người</a:t>
+            </a:r>
+            <a:r>
+              <a:rPr lang="en-US" sz="1800" dirty="0" spc="-2" kern="0">
+                <a:solidFill>
+                  <a:srgbClr val="6B6A66"/>
+                </a:solidFill>
+                <a:latin typeface="Be Vietnam Pro" pitchFamily="34" charset="0"/>
+                <a:ea typeface="Be Vietnam Pro" pitchFamily="34" charset="-122"/>
+                <a:cs typeface="Be Vietnam Pro" pitchFamily="34" charset="-120"/>
+              </a:rPr>
+              <a:t> làm nội</a:t>
+            </a:r>
+            <a:r>
+              <a:rPr lang="en-US" sz="1800" dirty="0" spc="-3" kern="0">
+                <a:solidFill>
+                  <a:srgbClr val="6B6A66"/>
+                </a:solidFill>
+                <a:latin typeface="Be Vietnam Pro" pitchFamily="34" charset="0"/>
+                <a:ea typeface="Be Vietnam Pro" pitchFamily="34" charset="-122"/>
+                <a:cs typeface="Be Vietnam Pro" pitchFamily="34" charset="-120"/>
+              </a:rPr>
+              <a:t> dung,</a:t>
+            </a:r>
+            <a:r>
+              <a:rPr lang="en-US" sz="1800" dirty="0" spc="-2" kern="0">
+                <a:solidFill>
+                  <a:srgbClr val="6B6A66"/>
+                </a:solidFill>
+                <a:latin typeface="Be Vietnam Pro" pitchFamily="34" charset="0"/>
+                <a:ea typeface="Be Vietnam Pro" pitchFamily="34" charset="-122"/>
+                <a:cs typeface="Be Vietnam Pro" pitchFamily="34" charset="-120"/>
+              </a:rPr>
+              <a:t> không</a:t>
+            </a:r>
+            <a:r>
+              <a:rPr lang="en-US" sz="1800" dirty="0" spc="-1" kern="0">
+                <a:solidFill>
+                  <a:srgbClr val="6B6A66"/>
+                </a:solidFill>
+                <a:latin typeface="Be Vietnam Pro" pitchFamily="34" charset="0"/>
+                <a:ea typeface="Be Vietnam Pro" pitchFamily="34" charset="-122"/>
+                <a:cs typeface="Be Vietnam Pro" pitchFamily="34" charset="-120"/>
+              </a:rPr>
+              <a:t> phải</a:t>
+            </a:r>
+            <a:r>
+              <a:rPr lang="en-US" sz="1800" dirty="0" spc="14" kern="0">
+                <a:solidFill>
+                  <a:srgbClr val="6B6A66"/>
+                </a:solidFill>
+                <a:latin typeface="Be Vietnam Pro" pitchFamily="34" charset="0"/>
+                <a:ea typeface="Be Vietnam Pro" pitchFamily="34" charset="-122"/>
+                <a:cs typeface="Be Vietnam Pro" pitchFamily="34" charset="-120"/>
+              </a:rPr>
+              <a:t> điều</a:t>
+            </a:r>
+            <a:r>
+              <a:rPr lang="en-US" sz="1800" dirty="0" spc="-4" kern="0">
+                <a:solidFill>
+                  <a:srgbClr val="6B6A66"/>
+                </a:solidFill>
+                <a:latin typeface="Be Vietnam Pro" pitchFamily="34" charset="0"/>
+                <a:ea typeface="Be Vietnam Pro" pitchFamily="34" charset="-122"/>
+                <a:cs typeface="Be Vietnam Pro" pitchFamily="34" charset="-120"/>
+              </a:rPr>
+              <a:t> nền</a:t>
+            </a:r>
+            <a:r>
+              <a:rPr lang="en-US" sz="1800" dirty="0" spc="-10" kern="0">
+                <a:solidFill>
+                  <a:srgbClr val="6B6A66"/>
+                </a:solidFill>
+                <a:latin typeface="Be Vietnam Pro" pitchFamily="34" charset="0"/>
+                <a:ea typeface="Be Vietnam Pro" pitchFamily="34" charset="-122"/>
+                <a:cs typeface="Be Vietnam Pro" pitchFamily="34" charset="-120"/>
+              </a:rPr>
+              <a:t> tảng</a:t>
+            </a:r>
+            <a:r>
+              <a:rPr lang="en-US" sz="1800" dirty="0" spc="-1" kern="0">
+                <a:solidFill>
+                  <a:srgbClr val="6B6A66"/>
+                </a:solidFill>
+                <a:latin typeface="Be Vietnam Pro" pitchFamily="34" charset="0"/>
+                <a:ea typeface="Be Vietnam Pro" pitchFamily="34" charset="-122"/>
+                <a:cs typeface="Be Vietnam Pro" pitchFamily="34" charset="-120"/>
+              </a:rPr>
+              <a:t> công</a:t>
+            </a:r>
+            <a:r>
+              <a:rPr lang="en-US" sz="1800" dirty="0" spc="-2" kern="0">
+                <a:solidFill>
+                  <a:srgbClr val="6B6A66"/>
+                </a:solidFill>
+                <a:latin typeface="Be Vietnam Pro" pitchFamily="34" charset="0"/>
+                <a:ea typeface="Be Vietnam Pro" pitchFamily="34" charset="-122"/>
+                <a:cs typeface="Be Vietnam Pro" pitchFamily="34" charset="-120"/>
+              </a:rPr>
+              <a:t> bố.</a:t>
+            </a:r>
+            <a:endParaRPr lang="en-US" sz="1800" dirty="0"/>
+          </a:p>
+        </p:txBody>
+      </p:sp>
+      <p:sp>
+        <p:nvSpPr>
+          <p:cNvPr id="34" name="Shape 32"/>
           <p:cNvSpPr/>
           <p:nvPr/>
         </p:nvSpPr>
@@ -12564,7 +12779,7 @@
       </p:sp>
       <p:pic>
         <p:nvPicPr>
-          <p:cNvPr id="34" name="Moda image moda-export-watermark-f967e795-6ee8-4a29-90ce-00c3bd48a956" descr="">    </p:cNvPr>
+          <p:cNvPr id="35" name="Moda image moda-export-watermark-f967e795-6ee8-4a29-90ce-00c3bd48a956" descr="">    </p:cNvPr>
           <p:cNvPicPr>
             <a:picLocks noChangeAspect="1"/>
           </p:cNvPicPr>

--- a/research/xu-huong-kiem-tien-youtube-tiktok-facebook.pptx
+++ b/research/xu-huong-kiem-tien-youtube-tiktok-facebook.pptx
@@ -6155,7 +6155,7 @@
               <a:buNone/>
             </a:pPr>
             <a:r>
-              <a:rPr lang="en-US" sz="3000" dirty="0" spc="-2" kern="0">
+              <a:rPr lang="en-US" sz="3000" dirty="0" spc="-22" kern="0">
                 <a:solidFill>
                   <a:srgbClr val="14161C"/>
                 </a:solidFill>
@@ -6163,10 +6163,10 @@
                 <a:ea typeface="Bricolage Grotesque ExtraBold" pitchFamily="34" charset="-122"/>
                 <a:cs typeface="Bricolage Grotesque ExtraBold" pitchFamily="34" charset="-120"/>
               </a:rPr>
-              <a:t>Không</a:t>
-            </a:r>
-            <a:r>
-              <a:rPr lang="en-US" sz="3000" dirty="0" spc="-1" kern="0">
+              <a:t>Chưa</a:t>
+            </a:r>
+            <a:r>
+              <a:rPr lang="en-US" sz="3000" dirty="0" spc="2" kern="0">
                 <a:solidFill>
                   <a:srgbClr val="14161C"/>
                 </a:solidFill>
@@ -6174,10 +6174,10 @@
                 <a:ea typeface="Bricolage Grotesque ExtraBold" pitchFamily="34" charset="-122"/>
                 <a:cs typeface="Bricolage Grotesque ExtraBold" pitchFamily="34" charset="-120"/>
               </a:rPr>
-              <a:t> nền</a:t>
-            </a:r>
-            <a:r>
-              <a:rPr lang="en-US" sz="3000" dirty="0" spc="-2" kern="0">
+              <a:t> thấy</a:t>
+            </a:r>
+            <a:r>
+              <a:rPr lang="en-US" sz="3000" dirty="0" spc="-1" kern="0">
                 <a:solidFill>
                   <a:srgbClr val="14161C"/>
                 </a:solidFill>
@@ -6185,7 +6185,7 @@
                 <a:ea typeface="Bricolage Grotesque ExtraBold" pitchFamily="34" charset="-122"/>
                 <a:cs typeface="Bricolage Grotesque ExtraBold" pitchFamily="34" charset="-120"/>
               </a:rPr>
-              <a:t> tảng</a:t>
+              <a:t> tài</a:t>
             </a:r>
             <a:r>
               <a:rPr lang="en-US" sz="3000" dirty="0" spc="1" kern="0">
@@ -6196,10 +6196,10 @@
                 <a:ea typeface="Bricolage Grotesque ExtraBold" pitchFamily="34" charset="-122"/>
                 <a:cs typeface="Bricolage Grotesque ExtraBold" pitchFamily="34" charset="-120"/>
               </a:rPr>
-              <a:t> nào</a:t>
-            </a:r>
-            <a:r>
-              <a:rPr lang="en-US" sz="3000" dirty="0" spc="0" kern="0">
+              <a:t> liệu</a:t>
+            </a:r>
+            <a:r>
+              <a:rPr lang="en-US" sz="3000" dirty="0" spc="-1" kern="0">
                 <a:solidFill>
                   <a:srgbClr val="14161C"/>
                 </a:solidFill>
@@ -6207,7 +6207,18 @@
                 <a:ea typeface="Bricolage Grotesque ExtraBold" pitchFamily="34" charset="-122"/>
                 <a:cs typeface="Bricolage Grotesque ExtraBold" pitchFamily="34" charset="-120"/>
               </a:rPr>
-              <a:t> nói</a:t>
+              <a:t> nền tảng</a:t>
+            </a:r>
+            <a:r>
+              <a:rPr lang="en-US" sz="3000" dirty="0" spc="0" kern="0">
+                <a:solidFill>
+                  <a:srgbClr val="14161C"/>
+                </a:solidFill>
+                <a:latin typeface="Bricolage Grotesque ExtraBold" pitchFamily="34" charset="0"/>
+                <a:ea typeface="Bricolage Grotesque ExtraBold" pitchFamily="34" charset="-122"/>
+                <a:cs typeface="Bricolage Grotesque ExtraBold" pitchFamily="34" charset="-120"/>
+              </a:rPr>
+              <a:t> nào nói</a:t>
             </a:r>
             <a:r>
               <a:rPr lang="en-US" sz="3000" dirty="0" spc="3" kern="0">

--- a/research/xu-huong-kiem-tien-youtube-tiktok-facebook.pptx
+++ b/research/xu-huong-kiem-tien-youtube-tiktok-facebook.pptx
@@ -19800,7 +19800,7 @@
               <a:t> đến</a:t>
             </a:r>
             <a:r>
-              <a:rPr lang="en-US" sz="1950" dirty="0" spc="3" kern="0">
+              <a:rPr lang="en-US" sz="1950" dirty="0" spc="2" kern="0">
                 <a:solidFill>
                   <a:srgbClr val="6B6A66"/>
                 </a:solidFill>
@@ -19808,7 +19808,7 @@
                 <a:ea typeface="Be Vietnam Pro" pitchFamily="34" charset="-122"/>
                 <a:cs typeface="Be Vietnam Pro" pitchFamily="34" charset="-120"/>
               </a:rPr>
-              <a:t> 0,10</a:t>
+              <a:t> 0,20</a:t>
             </a:r>
             <a:r>
               <a:rPr lang="en-US" sz="1950" dirty="0" spc="-1" kern="0">
@@ -19834,7 +19834,7 @@
         <p:spPr>
           <a:xfrm>
             <a:off x="8008620" y="4219575"/>
-            <a:ext cx="1389698" cy="323850"/>
+            <a:ext cx="2440305" cy="323850"/>
           </a:xfrm>
           <a:prstGeom prst="roundRect">
             <a:avLst>
@@ -19963,7 +19963,40 @@
                 <a:ea typeface="Be Vietnam Pro" pitchFamily="34" charset="-122"/>
                 <a:cs typeface="Be Vietnam Pro" pitchFamily="34" charset="-120"/>
               </a:rPr>
-              <a:t>khoảng 0,22 USD</a:t>
+              <a:t>khoảng</a:t>
+            </a:r>
+            <a:r>
+              <a:rPr lang="en-US" sz="1950" dirty="0" spc="1" kern="0">
+                <a:solidFill>
+                  <a:srgbClr val="6B6A66"/>
+                </a:solidFill>
+                <a:latin typeface="Be Vietnam Pro" pitchFamily="34" charset="0"/>
+                <a:ea typeface="Be Vietnam Pro" pitchFamily="34" charset="-122"/>
+                <a:cs typeface="Be Vietnam Pro" pitchFamily="34" charset="-120"/>
+              </a:rPr>
+              <a:t> 0,18</a:t>
+            </a:r>
+            <a:r>
+              <a:rPr lang="en-US" sz="1950" dirty="0" spc="12" kern="0">
+                <a:solidFill>
+                  <a:srgbClr val="6B6A66"/>
+                </a:solidFill>
+                <a:latin typeface="Be Vietnam Pro" pitchFamily="34" charset="0"/>
+                <a:ea typeface="Be Vietnam Pro" pitchFamily="34" charset="-122"/>
+                <a:cs typeface="Be Vietnam Pro" pitchFamily="34" charset="-120"/>
+              </a:rPr>
+              <a:t> đến</a:t>
+            </a:r>
+            <a:r>
+              <a:rPr lang="en-US" sz="1950" dirty="0" spc="-1" kern="0">
+                <a:solidFill>
+                  <a:srgbClr val="6B6A66"/>
+                </a:solidFill>
+                <a:latin typeface="Be Vietnam Pro" pitchFamily="34" charset="0"/>
+                <a:ea typeface="Be Vietnam Pro" pitchFamily="34" charset="-122"/>
+                <a:cs typeface="Be Vietnam Pro" pitchFamily="34" charset="-120"/>
+              </a:rPr>
+              <a:t> 0,22 USD</a:t>
             </a:r>
             <a:endParaRPr lang="en-US" sz="1950" dirty="0"/>
           </a:p>
@@ -19977,8 +20010,8 @@
         </p:nvSpPr>
         <p:spPr>
           <a:xfrm>
-            <a:off x="10420350" y="5267325"/>
-            <a:ext cx="342900" cy="342900"/>
+            <a:off x="10118407" y="5267325"/>
+            <a:ext cx="646748" cy="342900"/>
           </a:xfrm>
           <a:prstGeom prst="roundRect">
             <a:avLst>
@@ -20419,7 +20452,7 @@
               <a:buNone/>
             </a:pPr>
             <a:r>
-              <a:rPr lang="en-US" sz="1950" dirty="0" spc="3" kern="0">
+              <a:rPr lang="en-US" sz="1800" dirty="0" spc="-2" kern="0">
                 <a:solidFill>
                   <a:srgbClr val="6B6A66"/>
                 </a:solidFill>
@@ -20430,7 +20463,7 @@
               <a:t>Thang</a:t>
             </a:r>
             <a:r>
-              <a:rPr lang="en-US" sz="1950" dirty="0" spc="-1" kern="0">
+              <a:rPr lang="en-US" sz="1800" dirty="0" spc="0" kern="0">
                 <a:solidFill>
                   <a:srgbClr val="6B6A66"/>
                 </a:solidFill>
@@ -20441,7 +20474,7 @@
               <a:t> logarit.</a:t>
             </a:r>
             <a:r>
-              <a:rPr lang="en-US" sz="1950" dirty="0" spc="-2" kern="0">
+              <a:rPr lang="en-US" sz="1800" dirty="0" spc="1" kern="0">
                 <a:solidFill>
                   <a:srgbClr val="6B6A66"/>
                 </a:solidFill>
@@ -20452,7 +20485,7 @@
               <a:t> Ước</a:t>
             </a:r>
             <a:r>
-              <a:rPr lang="en-US" sz="1950" dirty="0" spc="0" kern="0">
+              <a:rPr lang="en-US" sz="1800" dirty="0" spc="-3" kern="0">
                 <a:solidFill>
                   <a:srgbClr val="6B6A66"/>
                 </a:solidFill>
@@ -20460,10 +20493,10 @@
                 <a:ea typeface="Be Vietnam Pro" pitchFamily="34" charset="-122"/>
                 <a:cs typeface="Be Vietnam Pro" pitchFamily="34" charset="-120"/>
               </a:rPr>
-              <a:t> tính của</a:t>
-            </a:r>
-            <a:r>
-              <a:rPr lang="en-US" sz="1950" dirty="0" spc="-3" kern="0">
+              <a:t> tính</a:t>
+            </a:r>
+            <a:r>
+              <a:rPr lang="en-US" sz="1800" dirty="0" spc="4" kern="0">
                 <a:solidFill>
                   <a:srgbClr val="6B6A66"/>
                 </a:solidFill>
@@ -20471,10 +20504,21 @@
                 <a:ea typeface="Be Vietnam Pro" pitchFamily="34" charset="-122"/>
                 <a:cs typeface="Be Vietnam Pro" pitchFamily="34" charset="-120"/>
               </a:rPr>
+              <a:t> của</a:t>
+            </a:r>
+            <a:r>
+              <a:rPr lang="en-US" sz="1800" dirty="0" spc="-5" kern="0">
+                <a:solidFill>
+                  <a:srgbClr val="6B6A66"/>
+                </a:solidFill>
+                <a:latin typeface="Be Vietnam Pro" pitchFamily="34" charset="0"/>
+                <a:ea typeface="Be Vietnam Pro" pitchFamily="34" charset="-122"/>
+                <a:cs typeface="Be Vietnam Pro" pitchFamily="34" charset="-120"/>
+              </a:rPr>
               <a:t> bên</a:t>
             </a:r>
             <a:r>
-              <a:rPr lang="en-US" sz="1950" dirty="0" spc="0" kern="0">
+              <a:rPr lang="en-US" sz="1800" dirty="0" spc="-1" kern="0">
                 <a:solidFill>
                   <a:srgbClr val="6B6A66"/>
                 </a:solidFill>
@@ -20485,7 +20529,7 @@
               <a:t> thứ</a:t>
             </a:r>
             <a:r>
-              <a:rPr lang="en-US" sz="1950" dirty="0" spc="-5" kern="0">
+              <a:rPr lang="en-US" sz="1800" dirty="0" spc="-2" kern="0">
                 <a:solidFill>
                   <a:srgbClr val="6B6A66"/>
                 </a:solidFill>
@@ -20493,10 +20537,10 @@
                 <a:ea typeface="Be Vietnam Pro" pitchFamily="34" charset="-122"/>
                 <a:cs typeface="Be Vietnam Pro" pitchFamily="34" charset="-120"/>
               </a:rPr>
-              <a:t> ba:</a:t>
-            </a:r>
-            <a:r>
-              <a:rPr lang="en-US" sz="1950" dirty="0" spc="2" kern="0">
+              <a:t> ba,</a:t>
+            </a:r>
+            <a:r>
+              <a:rPr lang="en-US" sz="1800" dirty="0" spc="-3" kern="0">
                 <a:solidFill>
                   <a:srgbClr val="6B6A66"/>
                 </a:solidFill>
@@ -20507,7 +20551,7 @@
               <a:t> nền</a:t>
             </a:r>
             <a:r>
-              <a:rPr lang="en-US" sz="1950" dirty="0" spc="-7" kern="0">
+              <a:rPr lang="en-US" sz="1800" dirty="0" spc="-10" kern="0">
                 <a:solidFill>
                   <a:srgbClr val="6B6A66"/>
                 </a:solidFill>
@@ -20518,7 +20562,7 @@
               <a:t> tảng</a:t>
             </a:r>
             <a:r>
-              <a:rPr lang="en-US" sz="1950" dirty="0" spc="0" kern="0">
+              <a:rPr lang="en-US" sz="1800" dirty="0" spc="-2" kern="0">
                 <a:solidFill>
                   <a:srgbClr val="6B6A66"/>
                 </a:solidFill>
@@ -20526,10 +20570,10 @@
                 <a:ea typeface="Be Vietnam Pro" pitchFamily="34" charset="-122"/>
                 <a:cs typeface="Be Vietnam Pro" pitchFamily="34" charset="-120"/>
               </a:rPr>
-              <a:t> không</a:t>
-            </a:r>
-            <a:r>
-              <a:rPr lang="en-US" sz="1950" dirty="0" spc="-1" kern="0">
+              <a:t> không công</a:t>
+            </a:r>
+            <a:r>
+              <a:rPr lang="en-US" sz="1800" dirty="0" spc="-3" kern="0">
                 <a:solidFill>
                   <a:srgbClr val="6B6A66"/>
                 </a:solidFill>
@@ -20537,10 +20581,10 @@
                 <a:ea typeface="Be Vietnam Pro" pitchFamily="34" charset="-122"/>
                 <a:cs typeface="Be Vietnam Pro" pitchFamily="34" charset="-120"/>
               </a:rPr>
-              <a:t> công</a:t>
-            </a:r>
-            <a:r>
-              <a:rPr lang="en-US" sz="1950" dirty="0" spc="-6" kern="0">
+              <a:t> bố</a:t>
+            </a:r>
+            <a:r>
+              <a:rPr lang="en-US" sz="1800" dirty="0" spc="0" kern="0">
                 <a:solidFill>
                   <a:srgbClr val="6B6A66"/>
                 </a:solidFill>
@@ -20548,10 +20592,10 @@
                 <a:ea typeface="Be Vietnam Pro" pitchFamily="34" charset="-122"/>
                 <a:cs typeface="Be Vietnam Pro" pitchFamily="34" charset="-120"/>
               </a:rPr>
-              <a:t> bố</a:t>
-            </a:r>
-            <a:r>
-              <a:rPr lang="en-US" sz="1950" dirty="0" spc="1" kern="0">
+              <a:t> RPM.</a:t>
+            </a:r>
+            <a:r>
+              <a:rPr lang="en-US" sz="1800" dirty="0" spc="2" kern="0">
                 <a:solidFill>
                   <a:srgbClr val="6B6A66"/>
                 </a:solidFill>
@@ -20559,9 +20603,119 @@
                 <a:ea typeface="Be Vietnam Pro" pitchFamily="34" charset="-122"/>
                 <a:cs typeface="Be Vietnam Pro" pitchFamily="34" charset="-120"/>
               </a:rPr>
-              <a:t> RPM.</a:t>
-            </a:r>
-            <a:endParaRPr lang="en-US" sz="1950" dirty="0"/>
+              <a:t> Shorts: các</a:t>
+            </a:r>
+            <a:r>
+              <a:rPr lang="en-US" sz="1800" dirty="0" spc="-4" kern="0">
+                <a:solidFill>
+                  <a:srgbClr val="6B6A66"/>
+                </a:solidFill>
+                <a:latin typeface="Be Vietnam Pro" pitchFamily="34" charset="0"/>
+                <a:ea typeface="Be Vietnam Pro" pitchFamily="34" charset="-122"/>
+                <a:cs typeface="Be Vietnam Pro" pitchFamily="34" charset="-120"/>
+              </a:rPr>
+              <a:t> nguồn</a:t>
+            </a:r>
+            <a:r>
+              <a:rPr lang="en-US" sz="1800" dirty="0" spc="-3" kern="0">
+                <a:solidFill>
+                  <a:srgbClr val="6B6A66"/>
+                </a:solidFill>
+                <a:latin typeface="Be Vietnam Pro" pitchFamily="34" charset="0"/>
+                <a:ea typeface="Be Vietnam Pro" pitchFamily="34" charset="-122"/>
+                <a:cs typeface="Be Vietnam Pro" pitchFamily="34" charset="-120"/>
+              </a:rPr>
+              <a:t> nêu</a:t>
+            </a:r>
+            <a:r>
+              <a:rPr lang="en-US" sz="1800" dirty="0" spc="-2" kern="0">
+                <a:solidFill>
+                  <a:srgbClr val="6B6A66"/>
+                </a:solidFill>
+                <a:latin typeface="Be Vietnam Pro" pitchFamily="34" charset="0"/>
+                <a:ea typeface="Be Vietnam Pro" pitchFamily="34" charset="-122"/>
+                <a:cs typeface="Be Vietnam Pro" pitchFamily="34" charset="-120"/>
+              </a:rPr>
+              <a:t> khoảng</a:t>
+            </a:r>
+            <a:r>
+              <a:rPr lang="en-US" sz="1800" dirty="0" spc="1" kern="0">
+                <a:solidFill>
+                  <a:srgbClr val="6B6A66"/>
+                </a:solidFill>
+                <a:latin typeface="Be Vietnam Pro" pitchFamily="34" charset="0"/>
+                <a:ea typeface="Be Vietnam Pro" pitchFamily="34" charset="-122"/>
+                <a:cs typeface="Be Vietnam Pro" pitchFamily="34" charset="-120"/>
+              </a:rPr>
+              <a:t> khác</a:t>
+            </a:r>
+            <a:r>
+              <a:rPr lang="en-US" sz="1800" dirty="0" spc="-1" kern="0">
+                <a:solidFill>
+                  <a:srgbClr val="6B6A66"/>
+                </a:solidFill>
+                <a:latin typeface="Be Vietnam Pro" pitchFamily="34" charset="0"/>
+                <a:ea typeface="Be Vietnam Pro" pitchFamily="34" charset="-122"/>
+                <a:cs typeface="Be Vietnam Pro" pitchFamily="34" charset="-120"/>
+              </a:rPr>
+              <a:t> nhau.</a:t>
+            </a:r>
+            <a:r>
+              <a:rPr lang="en-US" sz="1800" dirty="0" spc="-6" kern="0">
+                <a:solidFill>
+                  <a:srgbClr val="6B6A66"/>
+                </a:solidFill>
+                <a:latin typeface="Be Vietnam Pro" pitchFamily="34" charset="0"/>
+                <a:ea typeface="Be Vietnam Pro" pitchFamily="34" charset="-122"/>
+                <a:cs typeface="Be Vietnam Pro" pitchFamily="34" charset="-120"/>
+              </a:rPr>
+              <a:t> Việt</a:t>
+            </a:r>
+            <a:r>
+              <a:rPr lang="en-US" sz="1800" dirty="0" spc="2" kern="0">
+                <a:solidFill>
+                  <a:srgbClr val="6B6A66"/>
+                </a:solidFill>
+                <a:latin typeface="Be Vietnam Pro" pitchFamily="34" charset="0"/>
+                <a:ea typeface="Be Vietnam Pro" pitchFamily="34" charset="-122"/>
+                <a:cs typeface="Be Vietnam Pro" pitchFamily="34" charset="-120"/>
+              </a:rPr>
+              <a:t> Nam: hai</a:t>
+            </a:r>
+            <a:r>
+              <a:rPr lang="en-US" sz="1800" dirty="0" spc="-4" kern="0">
+                <a:solidFill>
+                  <a:srgbClr val="6B6A66"/>
+                </a:solidFill>
+                <a:latin typeface="Be Vietnam Pro" pitchFamily="34" charset="0"/>
+                <a:ea typeface="Be Vietnam Pro" pitchFamily="34" charset="-122"/>
+                <a:cs typeface="Be Vietnam Pro" pitchFamily="34" charset="-120"/>
+              </a:rPr>
+              <a:t> bản</a:t>
+            </a:r>
+            <a:r>
+              <a:rPr lang="en-US" sz="1800" dirty="0" spc="-5" kern="0">
+                <a:solidFill>
+                  <a:srgbClr val="6B6A66"/>
+                </a:solidFill>
+                <a:latin typeface="Be Vietnam Pro" pitchFamily="34" charset="0"/>
+                <a:ea typeface="Be Vietnam Pro" pitchFamily="34" charset="-122"/>
+                <a:cs typeface="Be Vietnam Pro" pitchFamily="34" charset="-120"/>
+              </a:rPr>
+              <a:t> số</a:t>
+            </a:r>
+            <a:r>
+              <a:rPr lang="en-US" sz="1800" dirty="0" spc="-2" kern="0">
+                <a:solidFill>
+                  <a:srgbClr val="6B6A66"/>
+                </a:solidFill>
+                <a:latin typeface="Be Vietnam Pro" pitchFamily="34" charset="0"/>
+                <a:ea typeface="Be Vietnam Pro" pitchFamily="34" charset="-122"/>
+                <a:cs typeface="Be Vietnam Pro" pitchFamily="34" charset="-120"/>
+              </a:rPr>
+              <a:t> liệu.</a:t>
+            </a:r>
+            <a:endParaRPr lang="en-US" sz="1800" dirty="0"/>
           </a:p>
         </p:txBody>
       </p:sp>
@@ -21594,7 +21748,7 @@
               <a:buNone/>
             </a:pPr>
             <a:r>
-              <a:rPr lang="en-US" sz="3450" dirty="0" spc="-2" kern="0">
+              <a:rPr lang="en-US" sz="3450" dirty="0" spc="-5" kern="0">
                 <a:solidFill>
                   <a:srgbClr val="FF6A4D"/>
                 </a:solidFill>
@@ -21602,7 +21756,18 @@
                 <a:ea typeface="Bricolage Grotesque ExtraBold" pitchFamily="34" charset="-122"/>
                 <a:cs typeface="Bricolage Grotesque ExtraBold" pitchFamily="34" charset="-120"/>
               </a:rPr>
-              <a:t>khoảng</a:t>
+              <a:t>180</a:t>
+            </a:r>
+            <a:r>
+              <a:rPr lang="en-US" sz="3450" dirty="0" spc="9" kern="0">
+                <a:solidFill>
+                  <a:srgbClr val="FF6A4D"/>
+                </a:solidFill>
+                <a:latin typeface="Bricolage Grotesque ExtraBold" pitchFamily="34" charset="0"/>
+                <a:ea typeface="Bricolage Grotesque ExtraBold" pitchFamily="34" charset="-122"/>
+                <a:cs typeface="Bricolage Grotesque ExtraBold" pitchFamily="34" charset="-120"/>
+              </a:rPr>
+              <a:t> đến</a:t>
             </a:r>
             <a:r>
               <a:rPr lang="en-US" sz="3450" dirty="0" spc="3" kern="0">
@@ -21741,7 +21906,7 @@
               <a:t> đến</a:t>
             </a:r>
             <a:r>
-              <a:rPr lang="en-US" sz="3450" dirty="0" spc="0" kern="0">
+              <a:rPr lang="en-US" sz="3450" dirty="0" spc="-1" kern="0">
                 <a:solidFill>
                   <a:srgbClr val="FF6A4D"/>
                 </a:solidFill>
@@ -21749,7 +21914,7 @@
                 <a:ea typeface="Bricolage Grotesque ExtraBold" pitchFamily="34" charset="-122"/>
                 <a:cs typeface="Bricolage Grotesque ExtraBold" pitchFamily="34" charset="-120"/>
               </a:rPr>
-              <a:t> 100</a:t>
+              <a:t> 200</a:t>
             </a:r>
             <a:r>
               <a:rPr lang="en-US" sz="3450" dirty="0" spc="3" kern="0">

--- a/research/xu-huong-kiem-tien-youtube-tiktok-facebook.pptx
+++ b/research/xu-huong-kiem-tien-youtube-tiktok-facebook.pptx
@@ -5286,6 +5286,61 @@
               <a:t> verify:</a:t>
             </a:r>
             <a:r>
+              <a:rPr lang="en-US" sz="2550" dirty="0" spc="1" kern="0">
+                <a:solidFill>
+                  <a:srgbClr val="14161C"/>
+                </a:solidFill>
+                <a:latin typeface="Be Vietnam Pro" pitchFamily="34" charset="0"/>
+                <a:ea typeface="Be Vietnam Pro" pitchFamily="34" charset="-122"/>
+                <a:cs typeface="Be Vietnam Pro" pitchFamily="34" charset="-120"/>
+              </a:rPr>
+              <a:t> không</a:t>
+            </a:r>
+            <a:r>
+              <a:rPr lang="en-US" sz="2550" dirty="0" spc="0" kern="0">
+                <a:solidFill>
+                  <a:srgbClr val="14161C"/>
+                </a:solidFill>
+                <a:latin typeface="Be Vietnam Pro" pitchFamily="34" charset="0"/>
+                <a:ea typeface="Be Vietnam Pro" pitchFamily="34" charset="-122"/>
+                <a:cs typeface="Be Vietnam Pro" pitchFamily="34" charset="-120"/>
+              </a:rPr>
+              <a:t> bị</a:t>
+            </a:r>
+            <a:r>
+              <a:rPr lang="en-US" sz="2550" dirty="0" spc="-2" kern="0">
+                <a:solidFill>
+                  <a:srgbClr val="14161C"/>
+                </a:solidFill>
+                <a:latin typeface="Be Vietnam Pro" pitchFamily="34" charset="0"/>
+                <a:ea typeface="Be Vietnam Pro" pitchFamily="34" charset="-122"/>
+                <a:cs typeface="Be Vietnam Pro" pitchFamily="34" charset="-120"/>
+              </a:rPr>
+              <a:t> khóa</a:t>
+            </a:r>
+            <a:r>
+              <a:rPr lang="en-US" sz="2550" dirty="0" spc="8" kern="0">
+                <a:solidFill>
+                  <a:srgbClr val="14161C"/>
+                </a:solidFill>
+                <a:latin typeface="Be Vietnam Pro" pitchFamily="34" charset="0"/>
+                <a:ea typeface="Be Vietnam Pro" pitchFamily="34" charset="-122"/>
+                <a:cs typeface="Be Vietnam Pro" pitchFamily="34" charset="-120"/>
+              </a:rPr>
+              <a:t> riêng</a:t>
+            </a:r>
+            <a:r>
+              <a:rPr lang="en-US" sz="2550" dirty="0" spc="0" kern="0">
+                <a:solidFill>
+                  <a:srgbClr val="14161C"/>
+                </a:solidFill>
+                <a:latin typeface="Be Vietnam Pro" pitchFamily="34" charset="0"/>
+                <a:ea typeface="Be Vietnam Pro" pitchFamily="34" charset="-122"/>
+                <a:cs typeface="Be Vietnam Pro" pitchFamily="34" charset="-120"/>
+              </a:rPr>
+              <a:t> tư</a:t>
+            </a:r>
+            <a:r>
               <a:rPr lang="en-US" sz="2550" dirty="0" spc="-11" kern="0">
                 <a:solidFill>
                   <a:srgbClr val="14161C"/>
@@ -5294,10 +5349,10 @@
                 <a:ea typeface="Be Vietnam Pro" pitchFamily="34" charset="-122"/>
                 <a:cs typeface="Be Vietnam Pro" pitchFamily="34" charset="-120"/>
               </a:rPr>
-              <a:t> tài</a:t>
-            </a:r>
-            <a:r>
-              <a:rPr lang="en-US" sz="2550" dirty="0" spc="1" kern="0">
+              <a:t> (tài</a:t>
+            </a:r>
+            <a:r>
+              <a:rPr lang="en-US" sz="2550" dirty="0" spc="2" kern="0">
                 <a:solidFill>
                   <a:srgbClr val="14161C"/>
                 </a:solidFill>
@@ -5308,39 +5363,6 @@
               <a:t> liệu</a:t>
             </a:r>
             <a:r>
-              <a:rPr lang="en-US" sz="2550" dirty="0" spc="3" kern="0">
-                <a:solidFill>
-                  <a:srgbClr val="14161C"/>
-                </a:solidFill>
-                <a:latin typeface="Be Vietnam Pro" pitchFamily="34" charset="0"/>
-                <a:ea typeface="Be Vietnam Pro" pitchFamily="34" charset="-122"/>
-                <a:cs typeface="Be Vietnam Pro" pitchFamily="34" charset="-120"/>
-              </a:rPr>
-              <a:t> mâu</a:t>
-            </a:r>
-            <a:r>
-              <a:rPr lang="en-US" sz="2550" dirty="0" spc="1" kern="0">
-                <a:solidFill>
-                  <a:srgbClr val="14161C"/>
-                </a:solidFill>
-                <a:latin typeface="Be Vietnam Pro" pitchFamily="34" charset="0"/>
-                <a:ea typeface="Be Vietnam Pro" pitchFamily="34" charset="-122"/>
-                <a:cs typeface="Be Vietnam Pro" pitchFamily="34" charset="-120"/>
-              </a:rPr>
-              <a:t> thuẫn,</a:t>
-            </a:r>
-            <a:r>
-              <a:rPr lang="en-US" sz="2550" dirty="0" spc="0" kern="0">
-                <a:solidFill>
-                  <a:srgbClr val="14161C"/>
-                </a:solidFill>
-                <a:latin typeface="Be Vietnam Pro" pitchFamily="34" charset="0"/>
-                <a:ea typeface="Be Vietnam Pro" pitchFamily="34" charset="-122"/>
-                <a:cs typeface="Be Vietnam Pro" pitchFamily="34" charset="-120"/>
-              </a:rPr>
-              <a:t> cần</a:t>
-            </a:r>
-            <a:r>
               <a:rPr lang="en-US" sz="2550" dirty="0" spc="-1" kern="0">
                 <a:solidFill>
                   <a:srgbClr val="14161C"/>
@@ -5349,7 +5371,7 @@
                 <a:ea typeface="Be Vietnam Pro" pitchFamily="34" charset="-122"/>
                 <a:cs typeface="Be Vietnam Pro" pitchFamily="34" charset="-120"/>
               </a:rPr>
-              <a:t> thử</a:t>
+              <a:t> hiện hành)</a:t>
             </a:r>
             <a:endParaRPr lang="en-US" sz="2550" dirty="0"/>
           </a:p>
@@ -7384,7 +7406,7 @@
               <a:buChar char="•"/>
             </a:pPr>
             <a:r>
-              <a:rPr lang="en-US" sz="2700" dirty="0" spc="-1" kern="0">
+              <a:rPr lang="en-US" sz="2700" dirty="0" spc="-33" kern="0">
                 <a:solidFill>
                   <a:srgbClr val="E4E1D8"/>
                 </a:solidFill>
@@ -7392,10 +7414,10 @@
                 <a:ea typeface="Be Vietnam Pro" pitchFamily="34" charset="-122"/>
                 <a:cs typeface="Be Vietnam Pro" pitchFamily="34" charset="-120"/>
               </a:rPr>
-              <a:t>API</a:t>
-            </a:r>
-            <a:r>
-              <a:rPr lang="en-US" sz="2700" dirty="0" spc="-69" kern="0">
+              <a:t>Creator</a:t>
+            </a:r>
+            <a:r>
+              <a:rPr lang="en-US" sz="2700" dirty="0" spc="-40" kern="0">
                 <a:solidFill>
                   <a:srgbClr val="E4E1D8"/>
                 </a:solidFill>
@@ -7403,10 +7425,10 @@
                 <a:ea typeface="Be Vietnam Pro" pitchFamily="34" charset="-122"/>
                 <a:cs typeface="Be Vietnam Pro" pitchFamily="34" charset="-120"/>
               </a:rPr>
-              <a:t> YouTube</a:t>
-            </a:r>
-            <a:r>
-              <a:rPr lang="en-US" sz="2700" dirty="0" spc="8" kern="0">
+              <a:t> Rewards:</a:t>
+            </a:r>
+            <a:r>
+              <a:rPr lang="en-US" sz="2700" dirty="0" spc="-3" kern="0">
                 <a:solidFill>
                   <a:srgbClr val="E4E1D8"/>
                 </a:solidFill>
@@ -7414,10 +7436,10 @@
                 <a:ea typeface="Be Vietnam Pro" pitchFamily="34" charset="-122"/>
                 <a:cs typeface="Be Vietnam Pro" pitchFamily="34" charset="-120"/>
               </a:rPr>
-              <a:t> chưa</a:t>
-            </a:r>
-            <a:r>
-              <a:rPr lang="en-US" sz="2700" dirty="0" spc="1" kern="0">
+              <a:t> video</a:t>
+            </a:r>
+            <a:r>
+              <a:rPr lang="en-US" sz="2700" dirty="0" spc="-14" kern="0">
                 <a:solidFill>
                   <a:srgbClr val="E4E1D8"/>
                 </a:solidFill>
@@ -7425,10 +7447,10 @@
                 <a:ea typeface="Be Vietnam Pro" pitchFamily="34" charset="-122"/>
                 <a:cs typeface="Be Vietnam Pro" pitchFamily="34" charset="-120"/>
               </a:rPr>
-              <a:t> verify:</a:t>
-            </a:r>
-            <a:r>
-              <a:rPr lang="en-US" sz="2700" dirty="0" spc="-2" kern="0">
+              <a:t> toàn</a:t>
+            </a:r>
+            <a:r>
+              <a:rPr lang="en-US" sz="2700" dirty="0" spc="-3" kern="0">
                 <a:solidFill>
                   <a:srgbClr val="E4E1D8"/>
                 </a:solidFill>
@@ -7436,10 +7458,10 @@
                 <a:ea typeface="Be Vietnam Pro" pitchFamily="34" charset="-122"/>
                 <a:cs typeface="Be Vietnam Pro" pitchFamily="34" charset="-120"/>
               </a:rPr>
-              <a:t> thử</a:t>
-            </a:r>
-            <a:r>
-              <a:rPr lang="en-US" sz="2700" dirty="0" spc="-7" kern="0">
+              <a:t> AI</a:t>
+            </a:r>
+            <a:r>
+              <a:rPr lang="en-US" sz="2700" dirty="0" spc="0" kern="0">
                 <a:solidFill>
                   <a:srgbClr val="E4E1D8"/>
                 </a:solidFill>
@@ -7447,10 +7469,10 @@
                 <a:ea typeface="Be Vietnam Pro" pitchFamily="34" charset="-122"/>
                 <a:cs typeface="Be Vietnam Pro" pitchFamily="34" charset="-120"/>
               </a:rPr>
-              <a:t> một</a:t>
-            </a:r>
-            <a:r>
-              <a:rPr lang="en-US" sz="2700" dirty="0" spc="-2" kern="0">
+              <a:t> có</a:t>
+            </a:r>
+            <a:r>
+              <a:rPr lang="en-US" sz="2700" dirty="0" spc="-3" kern="0">
                 <a:solidFill>
                   <a:srgbClr val="E4E1D8"/>
                 </a:solidFill>
@@ -7458,7 +7480,29 @@
                 <a:ea typeface="Be Vietnam Pro" pitchFamily="34" charset="-122"/>
                 <a:cs typeface="Be Vietnam Pro" pitchFamily="34" charset="-120"/>
               </a:rPr>
-              <a:t> video</a:t>
+              <a:t> đủ</a:t>
+            </a:r>
+            <a:r>
+              <a:rPr lang="en-US" sz="2700" dirty="0" spc="20" kern="0">
+                <a:solidFill>
+                  <a:srgbClr val="E4E1D8"/>
+                </a:solidFill>
+                <a:latin typeface="Be Vietnam Pro" pitchFamily="34" charset="0"/>
+                <a:ea typeface="Be Vietnam Pro" pitchFamily="34" charset="-122"/>
+                <a:cs typeface="Be Vietnam Pro" pitchFamily="34" charset="-120"/>
+              </a:rPr>
+              <a:t> điều</a:t>
+            </a:r>
+            <a:r>
+              <a:rPr lang="en-US" sz="2700" dirty="0" spc="-3" kern="0">
+                <a:solidFill>
+                  <a:srgbClr val="E4E1D8"/>
+                </a:solidFill>
+                <a:latin typeface="Be Vietnam Pro" pitchFamily="34" charset="0"/>
+                <a:ea typeface="Be Vietnam Pro" pitchFamily="34" charset="-122"/>
+                <a:cs typeface="Be Vietnam Pro" pitchFamily="34" charset="-120"/>
+              </a:rPr>
+              <a:t> kiện?</a:t>
             </a:r>
             <a:endParaRPr lang="en-US" sz="2700" dirty="0"/>
           </a:p>

--- a/research/xu-huong-kiem-tien-youtube-tiktok-facebook.pptx
+++ b/research/xu-huong-kiem-tien-youtube-tiktok-facebook.pptx
@@ -5498,6 +5498,94 @@
               <a:t> audit:</a:t>
             </a:r>
             <a:r>
+              <a:rPr lang="en-US" sz="2550" dirty="0" spc="10" kern="0">
+                <a:solidFill>
+                  <a:srgbClr val="14161C"/>
+                </a:solidFill>
+                <a:latin typeface="Be Vietnam Pro" pitchFamily="34" charset="0"/>
+                <a:ea typeface="Be Vietnam Pro" pitchFamily="34" charset="-122"/>
+                <a:cs typeface="Be Vietnam Pro" pitchFamily="34" charset="-120"/>
+              </a:rPr>
+              <a:t> đăng</a:t>
+            </a:r>
+            <a:r>
+              <a:rPr lang="en-US" sz="2550" dirty="0" spc="9" kern="0">
+                <a:solidFill>
+                  <a:srgbClr val="14161C"/>
+                </a:solidFill>
+                <a:latin typeface="Be Vietnam Pro" pitchFamily="34" charset="0"/>
+                <a:ea typeface="Be Vietnam Pro" pitchFamily="34" charset="-122"/>
+                <a:cs typeface="Be Vietnam Pro" pitchFamily="34" charset="-120"/>
+              </a:rPr>
+              <a:t> riêng</a:t>
+            </a:r>
+            <a:r>
+              <a:rPr lang="en-US" sz="2550" dirty="0" spc="-2" kern="0">
+                <a:solidFill>
+                  <a:srgbClr val="14161C"/>
+                </a:solidFill>
+                <a:latin typeface="Be Vietnam Pro" pitchFamily="34" charset="0"/>
+                <a:ea typeface="Be Vietnam Pro" pitchFamily="34" charset="-122"/>
+                <a:cs typeface="Be Vietnam Pro" pitchFamily="34" charset="-120"/>
+              </a:rPr>
+              <a:t> tư,</a:t>
+            </a:r>
+            <a:r>
+              <a:rPr lang="en-US" sz="2550" dirty="0" spc="-1" kern="0">
+                <a:solidFill>
+                  <a:srgbClr val="14161C"/>
+                </a:solidFill>
+                <a:latin typeface="Be Vietnam Pro" pitchFamily="34" charset="0"/>
+                <a:ea typeface="Be Vietnam Pro" pitchFamily="34" charset="-122"/>
+                <a:cs typeface="Be Vietnam Pro" pitchFamily="34" charset="-120"/>
+              </a:rPr>
+              <a:t> tự</a:t>
+            </a:r>
+            <a:r>
+              <a:rPr lang="en-US" sz="2550" dirty="0" spc="13" kern="0">
+                <a:solidFill>
+                  <a:srgbClr val="14161C"/>
+                </a:solidFill>
+                <a:latin typeface="Be Vietnam Pro" pitchFamily="34" charset="0"/>
+                <a:ea typeface="Be Vietnam Pro" pitchFamily="34" charset="-122"/>
+                <a:cs typeface="Be Vietnam Pro" pitchFamily="34" charset="-120"/>
+              </a:rPr>
+              <a:t> đổi</a:t>
+            </a:r>
+            <a:r>
+              <a:rPr lang="en-US" sz="2550" dirty="0" spc="20" kern="0">
+                <a:solidFill>
+                  <a:srgbClr val="14161C"/>
+                </a:solidFill>
+                <a:latin typeface="Be Vietnam Pro" pitchFamily="34" charset="0"/>
+                <a:ea typeface="Be Vietnam Pro" pitchFamily="34" charset="-122"/>
+                <a:cs typeface="Be Vietnam Pro" pitchFamily="34" charset="-120"/>
+              </a:rPr>
+              <a:t> từng</a:t>
+            </a:r>
+            <a:r>
+              <a:rPr lang="en-US" sz="2550" dirty="0" spc="-4" kern="0">
+                <a:solidFill>
+                  <a:srgbClr val="14161C"/>
+                </a:solidFill>
+                <a:latin typeface="Be Vietnam Pro" pitchFamily="34" charset="0"/>
+                <a:ea typeface="Be Vietnam Pro" pitchFamily="34" charset="-122"/>
+                <a:cs typeface="Be Vietnam Pro" pitchFamily="34" charset="-120"/>
+              </a:rPr>
+              <a:t> bài</a:t>
+            </a:r>
+            <a:r>
+              <a:rPr lang="en-US" sz="2550" dirty="0" spc="-6" kern="0">
+                <a:solidFill>
+                  <a:srgbClr val="14161C"/>
+                </a:solidFill>
+                <a:latin typeface="Be Vietnam Pro" pitchFamily="34" charset="0"/>
+                <a:ea typeface="Be Vietnam Pro" pitchFamily="34" charset="-122"/>
+                <a:cs typeface="Be Vietnam Pro" pitchFamily="34" charset="-120"/>
+              </a:rPr>
+              <a:t> sang</a:t>
+            </a:r>
+            <a:r>
               <a:rPr lang="en-US" sz="2550" dirty="0" spc="0" kern="0">
                 <a:solidFill>
                   <a:srgbClr val="14161C"/>
@@ -5506,73 +5594,7 @@
                 <a:ea typeface="Be Vietnam Pro" pitchFamily="34" charset="-122"/>
                 <a:cs typeface="Be Vietnam Pro" pitchFamily="34" charset="-120"/>
               </a:rPr>
-              <a:t> chỉ</a:t>
-            </a:r>
-            <a:r>
-              <a:rPr lang="en-US" sz="2550" dirty="0" spc="11" kern="0">
-                <a:solidFill>
-                  <a:srgbClr val="14161C"/>
-                </a:solidFill>
-                <a:latin typeface="Be Vietnam Pro" pitchFamily="34" charset="0"/>
-                <a:ea typeface="Be Vietnam Pro" pitchFamily="34" charset="-122"/>
-                <a:cs typeface="Be Vietnam Pro" pitchFamily="34" charset="-120"/>
-              </a:rPr>
-              <a:t> đăng</a:t>
-            </a:r>
-            <a:r>
-              <a:rPr lang="en-US" sz="2550" dirty="0" spc="-1" kern="0">
-                <a:solidFill>
-                  <a:srgbClr val="14161C"/>
-                </a:solidFill>
-                <a:latin typeface="Be Vietnam Pro" pitchFamily="34" charset="0"/>
-                <a:ea typeface="Be Vietnam Pro" pitchFamily="34" charset="-122"/>
-                <a:cs typeface="Be Vietnam Pro" pitchFamily="34" charset="-120"/>
-              </a:rPr>
-              <a:t> ở</a:t>
-            </a:r>
-            <a:r>
-              <a:rPr lang="en-US" sz="2550" dirty="0" spc="0" kern="0">
-                <a:solidFill>
-                  <a:srgbClr val="14161C"/>
-                </a:solidFill>
-                <a:latin typeface="Be Vietnam Pro" pitchFamily="34" charset="0"/>
-                <a:ea typeface="Be Vietnam Pro" pitchFamily="34" charset="-122"/>
-                <a:cs typeface="Be Vietnam Pro" pitchFamily="34" charset="-120"/>
-              </a:rPr>
-              <a:t> chế</a:t>
-            </a:r>
-            <a:r>
-              <a:rPr lang="en-US" sz="2550" dirty="0" spc="17" kern="0">
-                <a:solidFill>
-                  <a:srgbClr val="14161C"/>
-                </a:solidFill>
-                <a:latin typeface="Be Vietnam Pro" pitchFamily="34" charset="0"/>
-                <a:ea typeface="Be Vietnam Pro" pitchFamily="34" charset="-122"/>
-                <a:cs typeface="Be Vietnam Pro" pitchFamily="34" charset="-120"/>
-              </a:rPr>
-              <a:t> độ</a:t>
-            </a:r>
-            <a:r>
-              <a:rPr lang="en-US" sz="2550" dirty="0" spc="9" kern="0">
-                <a:solidFill>
-                  <a:srgbClr val="14161C"/>
-                </a:solidFill>
-                <a:latin typeface="Be Vietnam Pro" pitchFamily="34" charset="0"/>
-                <a:ea typeface="Be Vietnam Pro" pitchFamily="34" charset="-122"/>
-                <a:cs typeface="Be Vietnam Pro" pitchFamily="34" charset="-120"/>
-              </a:rPr>
-              <a:t> riêng</a:t>
-            </a:r>
-            <a:r>
-              <a:rPr lang="en-US" sz="2550" dirty="0" spc="-2" kern="0">
-                <a:solidFill>
-                  <a:srgbClr val="14161C"/>
-                </a:solidFill>
-                <a:latin typeface="Be Vietnam Pro" pitchFamily="34" charset="0"/>
-                <a:ea typeface="Be Vietnam Pro" pitchFamily="34" charset="-122"/>
-                <a:cs typeface="Be Vietnam Pro" pitchFamily="34" charset="-120"/>
-              </a:rPr>
-              <a:t> tư</a:t>
+              <a:t> công khai</a:t>
             </a:r>
             <a:endParaRPr lang="en-US" sz="2550" dirty="0"/>
           </a:p>
@@ -5688,26 +5710,15 @@
               <a:buChar char="•"/>
             </a:pPr>
             <a:r>
-              <a:rPr lang="en-US" sz="2550" dirty="0" spc="-11" kern="0">
-                <a:solidFill>
-                  <a:srgbClr val="14161C"/>
-                </a:solidFill>
-                <a:latin typeface="Be Vietnam Pro" pitchFamily="34" charset="0"/>
-                <a:ea typeface="Be Vietnam Pro" pitchFamily="34" charset="-122"/>
-                <a:cs typeface="Be Vietnam Pro" pitchFamily="34" charset="-120"/>
-              </a:rPr>
-              <a:t>Thay</a:t>
-            </a:r>
-            <a:r>
-              <a:rPr lang="en-US" sz="2550" dirty="0" spc="2" kern="0">
-                <a:solidFill>
-                  <a:srgbClr val="14161C"/>
-                </a:solidFill>
-                <a:latin typeface="Be Vietnam Pro" pitchFamily="34" charset="0"/>
-                <a:ea typeface="Be Vietnam Pro" pitchFamily="34" charset="-122"/>
-                <a:cs typeface="Be Vietnam Pro" pitchFamily="34" charset="-120"/>
-              </a:rPr>
-              <a:t> thế:</a:t>
+              <a:rPr lang="en-US" sz="2550" dirty="0" spc="1" kern="0">
+                <a:solidFill>
+                  <a:srgbClr val="14161C"/>
+                </a:solidFill>
+                <a:latin typeface="Be Vietnam Pro" pitchFamily="34" charset="0"/>
+                <a:ea typeface="Be Vietnam Pro" pitchFamily="34" charset="-122"/>
+                <a:cs typeface="Be Vietnam Pro" pitchFamily="34" charset="-120"/>
+              </a:rPr>
+              <a:t>Cách khác:</a:t>
             </a:r>
             <a:r>
               <a:rPr lang="en-US" sz="2550" dirty="0" spc="-2" kern="0">
@@ -5721,6 +5732,17 @@
               <a:t> Upload</a:t>
             </a:r>
             <a:r>
+              <a:rPr lang="en-US" sz="2550" dirty="0" spc="0" kern="0">
+                <a:solidFill>
+                  <a:srgbClr val="14161C"/>
+                </a:solidFill>
+                <a:latin typeface="Be Vietnam Pro" pitchFamily="34" charset="0"/>
+                <a:ea typeface="Be Vietnam Pro" pitchFamily="34" charset="-122"/>
+                <a:cs typeface="Be Vietnam Pro" pitchFamily="34" charset="-120"/>
+              </a:rPr>
+              <a:t> hộp</a:t>
+            </a:r>
+            <a:r>
               <a:rPr lang="en-US" sz="2550" dirty="0" spc="-1" kern="0">
                 <a:solidFill>
                   <a:srgbClr val="14161C"/>
@@ -5729,32 +5751,10 @@
                 <a:ea typeface="Be Vietnam Pro" pitchFamily="34" charset="-122"/>
                 <a:cs typeface="Be Vietnam Pro" pitchFamily="34" charset="-120"/>
               </a:rPr>
-              <a:t> hộp</a:t>
-            </a:r>
-            <a:r>
-              <a:rPr lang="en-US" sz="2550" dirty="0" spc="-2" kern="0">
-                <a:solidFill>
-                  <a:srgbClr val="14161C"/>
-                </a:solidFill>
-                <a:latin typeface="Be Vietnam Pro" pitchFamily="34" charset="0"/>
-                <a:ea typeface="Be Vietnam Pro" pitchFamily="34" charset="-122"/>
-                <a:cs typeface="Be Vietnam Pro" pitchFamily="34" charset="-120"/>
-              </a:rPr>
-              <a:t> thư,</a:t>
-            </a:r>
-            <a:r>
-              <a:rPr lang="en-US" sz="2550" dirty="0" spc="1" kern="0">
-                <a:solidFill>
-                  <a:srgbClr val="14161C"/>
-                </a:solidFill>
-                <a:latin typeface="Be Vietnam Pro" pitchFamily="34" charset="0"/>
-                <a:ea typeface="Be Vietnam Pro" pitchFamily="34" charset="-122"/>
-                <a:cs typeface="Be Vietnam Pro" pitchFamily="34" charset="-120"/>
-              </a:rPr>
-              <a:t> hẹn</a:t>
-            </a:r>
-            <a:r>
-              <a:rPr lang="en-US" sz="2550" dirty="0" spc="-1" kern="0">
+              <a:t> thư, hẹn</a:t>
+            </a:r>
+            <a:r>
+              <a:rPr lang="en-US" sz="2550" dirty="0" spc="0" kern="0">
                 <a:solidFill>
                   <a:srgbClr val="14161C"/>
                 </a:solidFill>

--- a/research/xu-huong-kiem-tien-youtube-tiktok-facebook.pptx
+++ b/research/xu-huong-kiem-tien-youtube-tiktok-facebook.pptx
@@ -9149,21 +9149,10 @@
                 <a:ea typeface="Bricolage Grotesque ExtraBold" pitchFamily="34" charset="-122"/>
                 <a:cs typeface="Bricolage Grotesque ExtraBold" pitchFamily="34" charset="-120"/>
               </a:rPr>
-              <a:t> kiếm</a:t>
-            </a:r>
-            <a:r>
-              <a:rPr lang="en-US" sz="4200" dirty="0" spc="1" kern="0">
-                <a:solidFill>
-                  <a:srgbClr val="14161C"/>
-                </a:solidFill>
-                <a:latin typeface="Bricolage Grotesque ExtraBold" pitchFamily="34" charset="0"/>
-                <a:ea typeface="Bricolage Grotesque ExtraBold" pitchFamily="34" charset="-122"/>
-                <a:cs typeface="Bricolage Grotesque ExtraBold" pitchFamily="34" charset="-120"/>
-              </a:rPr>
-              <a:t> tiền</a:t>
-            </a:r>
-            <a:r>
-              <a:rPr lang="en-US" sz="4200" dirty="0" spc="-17" kern="0">
+              <a:t> quảng cáo</a:t>
+            </a:r>
+            <a:r>
+              <a:rPr lang="en-US" sz="4200" dirty="0" spc="-16" kern="0">
                 <a:solidFill>
                   <a:srgbClr val="14161C"/>
                 </a:solidFill>
@@ -14877,7 +14866,7 @@
               <a:t>Mốc</a:t>
             </a:r>
             <a:r>
-              <a:rPr lang="en-US" sz="7500" dirty="0" spc="-29" kern="0">
+              <a:rPr lang="en-US" sz="7500" dirty="0" spc="-7" kern="0">
                 <a:solidFill>
                   <a:srgbClr val="14161C"/>
                 </a:solidFill>
@@ -14885,10 +14874,10 @@
                 <a:ea typeface="Bricolage Grotesque ExtraBold" pitchFamily="34" charset="-122"/>
                 <a:cs typeface="Bricolage Grotesque ExtraBold" pitchFamily="34" charset="-120"/>
               </a:rPr>
-              <a:t> tối</a:t>
-            </a:r>
-            <a:r>
-              <a:rPr lang="en-US" sz="7500" dirty="0" spc="5" kern="0">
+              <a:t> bật</a:t>
+            </a:r>
+            <a:r>
+              <a:rPr lang="en-US" sz="7500" dirty="0" spc="3" kern="0">
                 <a:solidFill>
                   <a:srgbClr val="14161C"/>
                 </a:solidFill>
@@ -14896,10 +14885,10 @@
                 <a:ea typeface="Bricolage Grotesque ExtraBold" pitchFamily="34" charset="-122"/>
                 <a:cs typeface="Bricolage Grotesque ExtraBold" pitchFamily="34" charset="-120"/>
               </a:rPr>
-              <a:t> thiểu</a:t>
-            </a:r>
-            <a:r>
-              <a:rPr lang="en-US" sz="7500" dirty="0" spc="19" kern="0">
+              <a:t> kiếm</a:t>
+            </a:r>
+            <a:r>
+              <a:rPr lang="en-US" sz="7500" dirty="0" spc="4" kern="0">
                 <a:solidFill>
                   <a:srgbClr val="14161C"/>
                 </a:solidFill>
@@ -14907,7 +14896,7 @@
                 <a:ea typeface="Bricolage Grotesque ExtraBold" pitchFamily="34" charset="-122"/>
                 <a:cs typeface="Bricolage Grotesque ExtraBold" pitchFamily="34" charset="-120"/>
               </a:rPr>
-              <a:t> để</a:t>
+              <a:t> tiền</a:t>
             </a:r>
             <a:r>
               <a:rPr lang="en-US" sz="7500" dirty="0" spc="3" kern="0">
@@ -14918,18 +14907,7 @@
                 <a:ea typeface="Bricolage Grotesque ExtraBold" pitchFamily="34" charset="-122"/>
                 <a:cs typeface="Bricolage Grotesque ExtraBold" pitchFamily="34" charset="-120"/>
               </a:rPr>
-              <a:t> kiếm</a:t>
-            </a:r>
-            <a:r>
-              <a:rPr lang="en-US" sz="7500" dirty="0" spc="4" kern="0">
-                <a:solidFill>
-                  <a:srgbClr val="14161C"/>
-                </a:solidFill>
-                <a:latin typeface="Bricolage Grotesque ExtraBold" pitchFamily="34" charset="0"/>
-                <a:ea typeface="Bricolage Grotesque ExtraBold" pitchFamily="34" charset="-122"/>
-                <a:cs typeface="Bricolage Grotesque ExtraBold" pitchFamily="34" charset="-120"/>
-              </a:rPr>
-              <a:t> tiền</a:t>
+              <a:t> chính</a:t>
             </a:r>
             <a:endParaRPr lang="en-US" sz="7500" dirty="0"/>
           </a:p>
@@ -15050,6 +15028,39 @@
               </a:rPr>
               <a:t> 31/1/2027</a:t>
             </a:r>
+            <a:r>
+              <a:rPr lang="en-US" sz="1950" dirty="0" spc="0" kern="0">
+                <a:solidFill>
+                  <a:srgbClr val="6B6A66"/>
+                </a:solidFill>
+                <a:latin typeface="Be Vietnam Pro" pitchFamily="34" charset="0"/>
+                <a:ea typeface="Be Vietnam Pro" pitchFamily="34" charset="-122"/>
+                <a:cs typeface="Be Vietnam Pro" pitchFamily="34" charset="-120"/>
+              </a:rPr>
+              <a:t> ·</a:t>
+            </a:r>
+            <a:r>
+              <a:rPr lang="en-US" sz="1950" dirty="0" spc="1" kern="0">
+                <a:solidFill>
+                  <a:srgbClr val="6B6A66"/>
+                </a:solidFill>
+                <a:latin typeface="Be Vietnam Pro" pitchFamily="34" charset="0"/>
+                <a:ea typeface="Be Vietnam Pro" pitchFamily="34" charset="-122"/>
+                <a:cs typeface="Be Vietnam Pro" pitchFamily="34" charset="-120"/>
+              </a:rPr>
+              <a:t> quảng</a:t>
+            </a:r>
+            <a:r>
+              <a:rPr lang="en-US" sz="1950" dirty="0" spc="-2" kern="0">
+                <a:solidFill>
+                  <a:srgbClr val="6B6A66"/>
+                </a:solidFill>
+                <a:latin typeface="Be Vietnam Pro" pitchFamily="34" charset="0"/>
+                <a:ea typeface="Be Vietnam Pro" pitchFamily="34" charset="-122"/>
+                <a:cs typeface="Be Vietnam Pro" pitchFamily="34" charset="-120"/>
+              </a:rPr>
+              <a:t> cáo</a:t>
+            </a:r>
             <a:endParaRPr lang="en-US" sz="1950" dirty="0"/>
           </a:p>
         </p:txBody>
@@ -15217,6 +15228,138 @@
               <a:buNone/>
             </a:pPr>
             <a:r>
+              <a:rPr lang="en-US" sz="2100" dirty="0" spc="-2" kern="0">
+                <a:solidFill>
+                  <a:srgbClr val="6B6A66"/>
+                </a:solidFill>
+                <a:latin typeface="Be Vietnam Pro" pitchFamily="34" charset="0"/>
+                <a:ea typeface="Be Vietnam Pro" pitchFamily="34" charset="-122"/>
+                <a:cs typeface="Be Vietnam Pro" pitchFamily="34" charset="-120"/>
+              </a:rPr>
+              <a:t>Cấp</a:t>
+            </a:r>
+            <a:r>
+              <a:rPr lang="en-US" sz="2100" dirty="0" spc="-7" kern="0">
+                <a:solidFill>
+                  <a:srgbClr val="6B6A66"/>
+                </a:solidFill>
+                <a:latin typeface="Be Vietnam Pro" pitchFamily="34" charset="0"/>
+                <a:ea typeface="Be Vietnam Pro" pitchFamily="34" charset="-122"/>
+                <a:cs typeface="Be Vietnam Pro" pitchFamily="34" charset="-120"/>
+              </a:rPr>
+              <a:t> sớm</a:t>
+            </a:r>
+            <a:r>
+              <a:rPr lang="en-US" sz="2100" dirty="0" spc="-4" kern="0">
+                <a:solidFill>
+                  <a:srgbClr val="6B6A66"/>
+                </a:solidFill>
+                <a:latin typeface="Be Vietnam Pro" pitchFamily="34" charset="0"/>
+                <a:ea typeface="Be Vietnam Pro" pitchFamily="34" charset="-122"/>
+                <a:cs typeface="Be Vietnam Pro" pitchFamily="34" charset="-120"/>
+              </a:rPr>
+              <a:t> 500</a:t>
+            </a:r>
+            <a:r>
+              <a:rPr lang="en-US" sz="2100" dirty="0" spc="-1" kern="0">
+                <a:solidFill>
+                  <a:srgbClr val="6B6A66"/>
+                </a:solidFill>
+                <a:latin typeface="Be Vietnam Pro" pitchFamily="34" charset="0"/>
+                <a:ea typeface="Be Vietnam Pro" pitchFamily="34" charset="-122"/>
+                <a:cs typeface="Be Vietnam Pro" pitchFamily="34" charset="-120"/>
+              </a:rPr>
+              <a:t> sub</a:t>
+            </a:r>
+            <a:r>
+              <a:rPr lang="en-US" sz="2100" dirty="0" spc="-2" kern="0">
+                <a:solidFill>
+                  <a:srgbClr val="6B6A66"/>
+                </a:solidFill>
+                <a:latin typeface="Be Vietnam Pro" pitchFamily="34" charset="0"/>
+                <a:ea typeface="Be Vietnam Pro" pitchFamily="34" charset="-122"/>
+                <a:cs typeface="Be Vietnam Pro" pitchFamily="34" charset="-120"/>
+              </a:rPr>
+              <a:t> +</a:t>
+            </a:r>
+            <a:r>
+              <a:rPr lang="en-US" sz="2100" dirty="0" spc="-4" kern="0">
+                <a:solidFill>
+                  <a:srgbClr val="6B6A66"/>
+                </a:solidFill>
+                <a:latin typeface="Be Vietnam Pro" pitchFamily="34" charset="0"/>
+                <a:ea typeface="Be Vietnam Pro" pitchFamily="34" charset="-122"/>
+                <a:cs typeface="Be Vietnam Pro" pitchFamily="34" charset="-120"/>
+              </a:rPr>
+              <a:t> 3.000</a:t>
+            </a:r>
+            <a:r>
+              <a:rPr lang="en-US" sz="2100" dirty="0" spc="-1" kern="0">
+                <a:solidFill>
+                  <a:srgbClr val="6B6A66"/>
+                </a:solidFill>
+                <a:latin typeface="Be Vietnam Pro" pitchFamily="34" charset="0"/>
+                <a:ea typeface="Be Vietnam Pro" pitchFamily="34" charset="-122"/>
+                <a:cs typeface="Be Vietnam Pro" pitchFamily="34" charset="-120"/>
+              </a:rPr>
+              <a:t> giờ</a:t>
+            </a:r>
+            <a:r>
+              <a:rPr lang="en-US" sz="2100" dirty="0" spc="-4" kern="0">
+                <a:solidFill>
+                  <a:srgbClr val="6B6A66"/>
+                </a:solidFill>
+                <a:latin typeface="Be Vietnam Pro" pitchFamily="34" charset="0"/>
+                <a:ea typeface="Be Vietnam Pro" pitchFamily="34" charset="-122"/>
+                <a:cs typeface="Be Vietnam Pro" pitchFamily="34" charset="-120"/>
+              </a:rPr>
+              <a:t> hoặc</a:t>
+            </a:r>
+            <a:r>
+              <a:rPr lang="en-US" sz="2100" dirty="0" spc="-3" kern="0">
+                <a:solidFill>
+                  <a:srgbClr val="6B6A66"/>
+                </a:solidFill>
+                <a:latin typeface="Be Vietnam Pro" pitchFamily="34" charset="0"/>
+                <a:ea typeface="Be Vietnam Pro" pitchFamily="34" charset="-122"/>
+                <a:cs typeface="Be Vietnam Pro" pitchFamily="34" charset="-120"/>
+              </a:rPr>
+              <a:t> 3</a:t>
+            </a:r>
+            <a:r>
+              <a:rPr lang="en-US" sz="2100" dirty="0" spc="7" kern="0">
+                <a:solidFill>
+                  <a:srgbClr val="6B6A66"/>
+                </a:solidFill>
+                <a:latin typeface="Be Vietnam Pro" pitchFamily="34" charset="0"/>
+                <a:ea typeface="Be Vietnam Pro" pitchFamily="34" charset="-122"/>
+                <a:cs typeface="Be Vietnam Pro" pitchFamily="34" charset="-120"/>
+              </a:rPr>
+              <a:t> triệu</a:t>
+            </a:r>
+            <a:r>
+              <a:rPr lang="en-US" sz="2100" dirty="0" spc="-1" kern="0">
+                <a:solidFill>
+                  <a:srgbClr val="6B6A66"/>
+                </a:solidFill>
+                <a:latin typeface="Be Vietnam Pro" pitchFamily="34" charset="0"/>
+                <a:ea typeface="Be Vietnam Pro" pitchFamily="34" charset="-122"/>
+                <a:cs typeface="Be Vietnam Pro" pitchFamily="34" charset="-120"/>
+              </a:rPr>
+              <a:t> Shorts</a:t>
+            </a:r>
+            <a:r>
+              <a:rPr lang="en-US" sz="2100" dirty="0" spc="-4" kern="0">
+                <a:solidFill>
+                  <a:srgbClr val="6B6A66"/>
+                </a:solidFill>
+                <a:latin typeface="Be Vietnam Pro" pitchFamily="34" charset="0"/>
+                <a:ea typeface="Be Vietnam Pro" pitchFamily="34" charset="-122"/>
+                <a:cs typeface="Be Vietnam Pro" pitchFamily="34" charset="-120"/>
+              </a:rPr>
+              <a:t> ·</a:t>
+            </a:r>
+            <a:r>
               <a:rPr lang="en-US" sz="2100" dirty="0" spc="-5" kern="0">
                 <a:solidFill>
                   <a:srgbClr val="6B6A66"/>
@@ -15225,7 +15368,7 @@
                 <a:ea typeface="Be Vietnam Pro" pitchFamily="34" charset="-122"/>
                 <a:cs typeface="Be Vietnam Pro" pitchFamily="34" charset="-120"/>
               </a:rPr>
-              <a:t>Việt</a:t>
+              <a:t> Việt</a:t>
             </a:r>
             <a:r>
               <a:rPr lang="en-US" sz="2100" dirty="0" spc="-1" kern="0">
@@ -15259,39 +15402,6 @@
                 <a:cs typeface="Be Vietnam Pro" pitchFamily="34" charset="-120"/>
               </a:rPr>
               <a:t> trong</a:t>
-            </a:r>
-            <a:r>
-              <a:rPr lang="en-US" sz="2100" dirty="0" spc="-2" kern="0">
-                <a:solidFill>
-                  <a:srgbClr val="6B6A66"/>
-                </a:solidFill>
-                <a:latin typeface="Be Vietnam Pro" pitchFamily="34" charset="0"/>
-                <a:ea typeface="Be Vietnam Pro" pitchFamily="34" charset="-122"/>
-                <a:cs typeface="Be Vietnam Pro" pitchFamily="34" charset="-120"/>
-              </a:rPr>
-              <a:t> danh</a:t>
-            </a:r>
-            <a:r>
-              <a:rPr lang="en-US" sz="2100" dirty="0" spc="-5" kern="0">
-                <a:solidFill>
-                  <a:srgbClr val="6B6A66"/>
-                </a:solidFill>
-                <a:latin typeface="Be Vietnam Pro" pitchFamily="34" charset="0"/>
-                <a:ea typeface="Be Vietnam Pro" pitchFamily="34" charset="-122"/>
-                <a:cs typeface="Be Vietnam Pro" pitchFamily="34" charset="-120"/>
-              </a:rPr>
-              <a:t> sách</a:t>
-            </a:r>
-            <a:r>
-              <a:rPr lang="en-US" sz="2100" dirty="0" spc="4" kern="0">
-                <a:solidFill>
-                  <a:srgbClr val="6B6A66"/>
-                </a:solidFill>
-                <a:latin typeface="Be Vietnam Pro" pitchFamily="34" charset="0"/>
-                <a:ea typeface="Be Vietnam Pro" pitchFamily="34" charset="-122"/>
-                <a:cs typeface="Be Vietnam Pro" pitchFamily="34" charset="-120"/>
-              </a:rPr>
-              <a:t> nước</a:t>
             </a:r>
             <a:r>
               <a:rPr lang="en-US" sz="2100" dirty="0" spc="0" kern="0">
@@ -15423,6 +15533,39 @@
               </a:rPr>
               <a:t> 1/2/2027</a:t>
             </a:r>
+            <a:r>
+              <a:rPr lang="en-US" sz="1950" dirty="0" spc="-4" kern="0">
+                <a:solidFill>
+                  <a:srgbClr val="6B6A66"/>
+                </a:solidFill>
+                <a:latin typeface="Be Vietnam Pro" pitchFamily="34" charset="0"/>
+                <a:ea typeface="Be Vietnam Pro" pitchFamily="34" charset="-122"/>
+                <a:cs typeface="Be Vietnam Pro" pitchFamily="34" charset="-120"/>
+              </a:rPr>
+              <a:t> ·</a:t>
+            </a:r>
+            <a:r>
+              <a:rPr lang="en-US" sz="1950" dirty="0" spc="1" kern="0">
+                <a:solidFill>
+                  <a:srgbClr val="6B6A66"/>
+                </a:solidFill>
+                <a:latin typeface="Be Vietnam Pro" pitchFamily="34" charset="0"/>
+                <a:ea typeface="Be Vietnam Pro" pitchFamily="34" charset="-122"/>
+                <a:cs typeface="Be Vietnam Pro" pitchFamily="34" charset="-120"/>
+              </a:rPr>
+              <a:t> quảng</a:t>
+            </a:r>
+            <a:r>
+              <a:rPr lang="en-US" sz="1950" dirty="0" spc="-1" kern="0">
+                <a:solidFill>
+                  <a:srgbClr val="6B6A66"/>
+                </a:solidFill>
+                <a:latin typeface="Be Vietnam Pro" pitchFamily="34" charset="0"/>
+                <a:ea typeface="Be Vietnam Pro" pitchFamily="34" charset="-122"/>
+                <a:cs typeface="Be Vietnam Pro" pitchFamily="34" charset="-120"/>
+              </a:rPr>
+              <a:t> cáo</a:t>
+            </a:r>
             <a:endParaRPr lang="en-US" sz="1950" dirty="0"/>
           </a:p>
         </p:txBody>
@@ -15579,7 +15722,7 @@
               <a:buNone/>
             </a:pPr>
             <a:r>
-              <a:rPr lang="en-US" sz="2100" dirty="0" spc="-24" kern="0">
+              <a:rPr lang="en-US" sz="2100" dirty="0" spc="-2" kern="0">
                 <a:solidFill>
                   <a:srgbClr val="6B6A66"/>
                 </a:solidFill>
@@ -15587,10 +15730,10 @@
                 <a:ea typeface="Be Vietnam Pro" pitchFamily="34" charset="-122"/>
                 <a:cs typeface="Be Vietnam Pro" pitchFamily="34" charset="-120"/>
               </a:rPr>
-              <a:t>Kênh</a:t>
-            </a:r>
-            <a:r>
-              <a:rPr lang="en-US" sz="2100" dirty="0" spc="12" kern="0">
+              <a:t>Cấp</a:t>
+            </a:r>
+            <a:r>
+              <a:rPr lang="en-US" sz="2100" dirty="0" spc="-7" kern="0">
                 <a:solidFill>
                   <a:srgbClr val="6B6A66"/>
                 </a:solidFill>
@@ -15598,6 +15741,72 @@
                 <a:ea typeface="Be Vietnam Pro" pitchFamily="34" charset="-122"/>
                 <a:cs typeface="Be Vietnam Pro" pitchFamily="34" charset="-120"/>
               </a:rPr>
+              <a:t> sớm</a:t>
+            </a:r>
+            <a:r>
+              <a:rPr lang="en-US" sz="2100" dirty="0" spc="-4" kern="0">
+                <a:solidFill>
+                  <a:srgbClr val="6B6A66"/>
+                </a:solidFill>
+                <a:latin typeface="Be Vietnam Pro" pitchFamily="34" charset="0"/>
+                <a:ea typeface="Be Vietnam Pro" pitchFamily="34" charset="-122"/>
+                <a:cs typeface="Be Vietnam Pro" pitchFamily="34" charset="-120"/>
+              </a:rPr>
+              <a:t> 500</a:t>
+            </a:r>
+            <a:r>
+              <a:rPr lang="en-US" sz="2100" dirty="0" spc="-1" kern="0">
+                <a:solidFill>
+                  <a:srgbClr val="6B6A66"/>
+                </a:solidFill>
+                <a:latin typeface="Be Vietnam Pro" pitchFamily="34" charset="0"/>
+                <a:ea typeface="Be Vietnam Pro" pitchFamily="34" charset="-122"/>
+                <a:cs typeface="Be Vietnam Pro" pitchFamily="34" charset="-120"/>
+              </a:rPr>
+              <a:t> sub không</a:t>
+            </a:r>
+            <a:r>
+              <a:rPr lang="en-US" sz="2100" dirty="0" spc="10" kern="0">
+                <a:solidFill>
+                  <a:srgbClr val="6B6A66"/>
+                </a:solidFill>
+                <a:latin typeface="Be Vietnam Pro" pitchFamily="34" charset="0"/>
+                <a:ea typeface="Be Vietnam Pro" pitchFamily="34" charset="-122"/>
+                <a:cs typeface="Be Vietnam Pro" pitchFamily="34" charset="-120"/>
+              </a:rPr>
+              <a:t> đổi</a:t>
+            </a:r>
+            <a:r>
+              <a:rPr lang="en-US" sz="2100" dirty="0" spc="-4" kern="0">
+                <a:solidFill>
+                  <a:srgbClr val="6B6A66"/>
+                </a:solidFill>
+                <a:latin typeface="Be Vietnam Pro" pitchFamily="34" charset="0"/>
+                <a:ea typeface="Be Vietnam Pro" pitchFamily="34" charset="-122"/>
+                <a:cs typeface="Be Vietnam Pro" pitchFamily="34" charset="-120"/>
+              </a:rPr>
+              <a:t> ·</a:t>
+            </a:r>
+            <a:r>
+              <a:rPr lang="en-US" sz="2100" dirty="0" spc="-18" kern="0">
+                <a:solidFill>
+                  <a:srgbClr val="6B6A66"/>
+                </a:solidFill>
+                <a:latin typeface="Be Vietnam Pro" pitchFamily="34" charset="0"/>
+                <a:ea typeface="Be Vietnam Pro" pitchFamily="34" charset="-122"/>
+                <a:cs typeface="Be Vietnam Pro" pitchFamily="34" charset="-120"/>
+              </a:rPr>
+              <a:t> kênh</a:t>
+            </a:r>
+            <a:r>
+              <a:rPr lang="en-US" sz="2100" dirty="0" spc="13" kern="0">
+                <a:solidFill>
+                  <a:srgbClr val="6B6A66"/>
+                </a:solidFill>
+                <a:latin typeface="Be Vietnam Pro" pitchFamily="34" charset="0"/>
+                <a:ea typeface="Be Vietnam Pro" pitchFamily="34" charset="-122"/>
+                <a:cs typeface="Be Vietnam Pro" pitchFamily="34" charset="-120"/>
+              </a:rPr>
               <a:t> đã</a:t>
             </a:r>
             <a:r>
@@ -15620,10 +15829,10 @@
                 <a:ea typeface="Be Vietnam Pro" pitchFamily="34" charset="-122"/>
                 <a:cs typeface="Be Vietnam Pro" pitchFamily="34" charset="-120"/>
               </a:rPr>
-              <a:t> YPP không bị ảnh</a:t>
-            </a:r>
-            <a:r>
-              <a:rPr lang="en-US" sz="2100" dirty="0" spc="3" kern="0">
+              <a:t> YPP không bị</a:t>
+            </a:r>
+            <a:r>
+              <a:rPr lang="en-US" sz="2100" dirty="0" spc="-2" kern="0">
                 <a:solidFill>
                   <a:srgbClr val="6B6A66"/>
                 </a:solidFill>
@@ -15631,18 +15840,18 @@
                 <a:ea typeface="Be Vietnam Pro" pitchFamily="34" charset="-122"/>
                 <a:cs typeface="Be Vietnam Pro" pitchFamily="34" charset="-120"/>
               </a:rPr>
+              <a:t> ảnh</a:t>
+            </a:r>
+            <a:r>
+              <a:rPr lang="en-US" sz="2100" dirty="0" spc="4" kern="0">
+                <a:solidFill>
+                  <a:srgbClr val="6B6A66"/>
+                </a:solidFill>
+                <a:latin typeface="Be Vietnam Pro" pitchFamily="34" charset="0"/>
+                <a:ea typeface="Be Vietnam Pro" pitchFamily="34" charset="-122"/>
+                <a:cs typeface="Be Vietnam Pro" pitchFamily="34" charset="-120"/>
+              </a:rPr>
               <a:t> hưởng</a:t>
-            </a:r>
-            <a:r>
-              <a:rPr lang="en-US" sz="2100" dirty="0" spc="-2" kern="0">
-                <a:solidFill>
-                  <a:srgbClr val="6B6A66"/>
-                </a:solidFill>
-                <a:latin typeface="Be Vietnam Pro" pitchFamily="34" charset="0"/>
-                <a:ea typeface="Be Vietnam Pro" pitchFamily="34" charset="-122"/>
-                <a:cs typeface="Be Vietnam Pro" pitchFamily="34" charset="-120"/>
-              </a:rPr>
-              <a:t> tư cách</a:t>
             </a:r>
             <a:endParaRPr lang="en-US" sz="2100" dirty="0"/>
           </a:p>

--- a/research/xu-huong-kiem-tien-youtube-tiktok-facebook.pptx
+++ b/research/xu-huong-kiem-tien-youtube-tiktok-facebook.pptx
@@ -15239,7 +15239,7 @@
               <a:t>Cấp</a:t>
             </a:r>
             <a:r>
-              <a:rPr lang="en-US" sz="2100" dirty="0" spc="-7" kern="0">
+              <a:rPr lang="en-US" sz="2100" dirty="0" spc="-5" kern="0">
                 <a:solidFill>
                   <a:srgbClr val="6B6A66"/>
                 </a:solidFill>
@@ -15247,7 +15247,29 @@
                 <a:ea typeface="Be Vietnam Pro" pitchFamily="34" charset="-122"/>
                 <a:cs typeface="Be Vietnam Pro" pitchFamily="34" charset="-120"/>
               </a:rPr>
-              <a:t> sớm</a:t>
+              <a:t> sớm: 500</a:t>
+            </a:r>
+            <a:r>
+              <a:rPr lang="en-US" sz="2100" dirty="0" spc="-1" kern="0">
+                <a:solidFill>
+                  <a:srgbClr val="6B6A66"/>
+                </a:solidFill>
+                <a:latin typeface="Be Vietnam Pro" pitchFamily="34" charset="0"/>
+                <a:ea typeface="Be Vietnam Pro" pitchFamily="34" charset="-122"/>
+                <a:cs typeface="Be Vietnam Pro" pitchFamily="34" charset="-120"/>
+              </a:rPr>
+              <a:t> sub +</a:t>
+            </a:r>
+            <a:r>
+              <a:rPr lang="en-US" sz="2100" dirty="0" spc="-3" kern="0">
+                <a:solidFill>
+                  <a:srgbClr val="6B6A66"/>
+                </a:solidFill>
+                <a:latin typeface="Be Vietnam Pro" pitchFamily="34" charset="0"/>
+                <a:ea typeface="Be Vietnam Pro" pitchFamily="34" charset="-122"/>
+                <a:cs typeface="Be Vietnam Pro" pitchFamily="34" charset="-120"/>
+              </a:rPr>
+              <a:t> 3</a:t>
             </a:r>
             <a:r>
               <a:rPr lang="en-US" sz="2100" dirty="0" spc="-4" kern="0">
@@ -15258,7 +15280,18 @@
                 <a:ea typeface="Be Vietnam Pro" pitchFamily="34" charset="-122"/>
                 <a:cs typeface="Be Vietnam Pro" pitchFamily="34" charset="-120"/>
               </a:rPr>
-              <a:t> 500</a:t>
+              <a:t> video</a:t>
+            </a:r>
+            <a:r>
+              <a:rPr lang="en-US" sz="2100" dirty="0" spc="-2" kern="0">
+                <a:solidFill>
+                  <a:srgbClr val="6B6A66"/>
+                </a:solidFill>
+                <a:latin typeface="Be Vietnam Pro" pitchFamily="34" charset="0"/>
+                <a:ea typeface="Be Vietnam Pro" pitchFamily="34" charset="-122"/>
+                <a:cs typeface="Be Vietnam Pro" pitchFamily="34" charset="-120"/>
+              </a:rPr>
+              <a:t> công</a:t>
             </a:r>
             <a:r>
               <a:rPr lang="en-US" sz="2100" dirty="0" spc="-1" kern="0">
@@ -15269,10 +15302,10 @@
                 <a:ea typeface="Be Vietnam Pro" pitchFamily="34" charset="-122"/>
                 <a:cs typeface="Be Vietnam Pro" pitchFamily="34" charset="-120"/>
               </a:rPr>
-              <a:t> sub</a:t>
-            </a:r>
-            <a:r>
-              <a:rPr lang="en-US" sz="2100" dirty="0" spc="-2" kern="0">
+              <a:t> khai/90</a:t>
+            </a:r>
+            <a:r>
+              <a:rPr lang="en-US" sz="2100" dirty="0" spc="-16" kern="0">
                 <a:solidFill>
                   <a:srgbClr val="6B6A66"/>
                 </a:solidFill>
@@ -15280,6 +15313,17 @@
                 <a:ea typeface="Be Vietnam Pro" pitchFamily="34" charset="-122"/>
                 <a:cs typeface="Be Vietnam Pro" pitchFamily="34" charset="-120"/>
               </a:rPr>
+              <a:t> ngày</a:t>
+            </a:r>
+            <a:r>
+              <a:rPr lang="en-US" sz="2100" dirty="0" spc="0" kern="0">
+                <a:solidFill>
+                  <a:srgbClr val="6B6A66"/>
+                </a:solidFill>
+                <a:latin typeface="Be Vietnam Pro" pitchFamily="34" charset="0"/>
+                <a:ea typeface="Be Vietnam Pro" pitchFamily="34" charset="-122"/>
+                <a:cs typeface="Be Vietnam Pro" pitchFamily="34" charset="-120"/>
+              </a:rPr>
               <a:t> +</a:t>
             </a:r>
             <a:r>
@@ -15313,10 +15357,10 @@
                 <a:ea typeface="Be Vietnam Pro" pitchFamily="34" charset="-122"/>
                 <a:cs typeface="Be Vietnam Pro" pitchFamily="34" charset="-120"/>
               </a:rPr>
-              <a:t> hoặc</a:t>
-            </a:r>
-            <a:r>
-              <a:rPr lang="en-US" sz="2100" dirty="0" spc="-3" kern="0">
+              <a:t> hoặc 3</a:t>
+            </a:r>
+            <a:r>
+              <a:rPr lang="en-US" sz="2100" dirty="0" spc="7" kern="0">
                 <a:solidFill>
                   <a:srgbClr val="6B6A66"/>
                 </a:solidFill>
@@ -15324,10 +15368,10 @@
                 <a:ea typeface="Be Vietnam Pro" pitchFamily="34" charset="-122"/>
                 <a:cs typeface="Be Vietnam Pro" pitchFamily="34" charset="-120"/>
               </a:rPr>
-              <a:t> 3</a:t>
-            </a:r>
-            <a:r>
-              <a:rPr lang="en-US" sz="2100" dirty="0" spc="7" kern="0">
+              <a:t> triệu</a:t>
+            </a:r>
+            <a:r>
+              <a:rPr lang="en-US" sz="2100" dirty="0" spc="-1" kern="0">
                 <a:solidFill>
                   <a:srgbClr val="6B6A66"/>
                 </a:solidFill>
@@ -15335,84 +15379,7 @@
                 <a:ea typeface="Be Vietnam Pro" pitchFamily="34" charset="-122"/>
                 <a:cs typeface="Be Vietnam Pro" pitchFamily="34" charset="-120"/>
               </a:rPr>
-              <a:t> triệu</a:t>
-            </a:r>
-            <a:r>
-              <a:rPr lang="en-US" sz="2100" dirty="0" spc="-1" kern="0">
-                <a:solidFill>
-                  <a:srgbClr val="6B6A66"/>
-                </a:solidFill>
-                <a:latin typeface="Be Vietnam Pro" pitchFamily="34" charset="0"/>
-                <a:ea typeface="Be Vietnam Pro" pitchFamily="34" charset="-122"/>
-                <a:cs typeface="Be Vietnam Pro" pitchFamily="34" charset="-120"/>
-              </a:rPr>
               <a:t> Shorts</a:t>
-            </a:r>
-            <a:r>
-              <a:rPr lang="en-US" sz="2100" dirty="0" spc="-4" kern="0">
-                <a:solidFill>
-                  <a:srgbClr val="6B6A66"/>
-                </a:solidFill>
-                <a:latin typeface="Be Vietnam Pro" pitchFamily="34" charset="0"/>
-                <a:ea typeface="Be Vietnam Pro" pitchFamily="34" charset="-122"/>
-                <a:cs typeface="Be Vietnam Pro" pitchFamily="34" charset="-120"/>
-              </a:rPr>
-              <a:t> ·</a:t>
-            </a:r>
-            <a:r>
-              <a:rPr lang="en-US" sz="2100" dirty="0" spc="-5" kern="0">
-                <a:solidFill>
-                  <a:srgbClr val="6B6A66"/>
-                </a:solidFill>
-                <a:latin typeface="Be Vietnam Pro" pitchFamily="34" charset="0"/>
-                <a:ea typeface="Be Vietnam Pro" pitchFamily="34" charset="-122"/>
-                <a:cs typeface="Be Vietnam Pro" pitchFamily="34" charset="-120"/>
-              </a:rPr>
-              <a:t> Việt</a:t>
-            </a:r>
-            <a:r>
-              <a:rPr lang="en-US" sz="2100" dirty="0" spc="-1" kern="0">
-                <a:solidFill>
-                  <a:srgbClr val="6B6A66"/>
-                </a:solidFill>
-                <a:latin typeface="Be Vietnam Pro" pitchFamily="34" charset="0"/>
-                <a:ea typeface="Be Vietnam Pro" pitchFamily="34" charset="-122"/>
-                <a:cs typeface="Be Vietnam Pro" pitchFamily="34" charset="-120"/>
-              </a:rPr>
-              <a:t> Nam</a:t>
-            </a:r>
-            <a:r>
-              <a:rPr lang="en-US" sz="2100" dirty="0" spc="-4" kern="0">
-                <a:solidFill>
-                  <a:srgbClr val="6B6A66"/>
-                </a:solidFill>
-                <a:latin typeface="Be Vietnam Pro" pitchFamily="34" charset="0"/>
-                <a:ea typeface="Be Vietnam Pro" pitchFamily="34" charset="-122"/>
-                <a:cs typeface="Be Vietnam Pro" pitchFamily="34" charset="-120"/>
-              </a:rPr>
-              <a:t> có</a:t>
-            </a:r>
-            <a:r>
-              <a:rPr lang="en-US" sz="2100" dirty="0" spc="-15" kern="0">
-                <a:solidFill>
-                  <a:srgbClr val="6B6A66"/>
-                </a:solidFill>
-                <a:latin typeface="Be Vietnam Pro" pitchFamily="34" charset="0"/>
-                <a:ea typeface="Be Vietnam Pro" pitchFamily="34" charset="-122"/>
-                <a:cs typeface="Be Vietnam Pro" pitchFamily="34" charset="-120"/>
-              </a:rPr>
-              <a:t> trong</a:t>
-            </a:r>
-            <a:r>
-              <a:rPr lang="en-US" sz="2100" dirty="0" spc="0" kern="0">
-                <a:solidFill>
-                  <a:srgbClr val="6B6A66"/>
-                </a:solidFill>
-                <a:latin typeface="Be Vietnam Pro" pitchFamily="34" charset="0"/>
-                <a:ea typeface="Be Vietnam Pro" pitchFamily="34" charset="-122"/>
-                <a:cs typeface="Be Vietnam Pro" pitchFamily="34" charset="-120"/>
-              </a:rPr>
-              <a:t> YPP</a:t>
             </a:r>
             <a:endParaRPr lang="en-US" sz="2100" dirty="0"/>
           </a:p>
@@ -15744,6 +15711,28 @@
               <a:t> sớm</a:t>
             </a:r>
             <a:r>
+              <a:rPr lang="en-US" sz="2100" dirty="0" spc="-12" kern="0">
+                <a:solidFill>
+                  <a:srgbClr val="6B6A66"/>
+                </a:solidFill>
+                <a:latin typeface="Be Vietnam Pro" pitchFamily="34" charset="0"/>
+                <a:ea typeface="Be Vietnam Pro" pitchFamily="34" charset="-122"/>
+                <a:cs typeface="Be Vietnam Pro" pitchFamily="34" charset="-120"/>
+              </a:rPr>
+              <a:t> vẫn</a:t>
+            </a:r>
+            <a:r>
+              <a:rPr lang="en-US" sz="2100" dirty="0" spc="-2" kern="0">
+                <a:solidFill>
+                  <a:srgbClr val="6B6A66"/>
+                </a:solidFill>
+                <a:latin typeface="Be Vietnam Pro" pitchFamily="34" charset="0"/>
+                <a:ea typeface="Be Vietnam Pro" pitchFamily="34" charset="-122"/>
+                <a:cs typeface="Be Vietnam Pro" pitchFamily="34" charset="-120"/>
+              </a:rPr>
+              <a:t> cần 3</a:t>
+            </a:r>
+            <a:r>
               <a:rPr lang="en-US" sz="2100" dirty="0" spc="-4" kern="0">
                 <a:solidFill>
                   <a:srgbClr val="6B6A66"/>
@@ -15752,7 +15741,18 @@
                 <a:ea typeface="Be Vietnam Pro" pitchFamily="34" charset="-122"/>
                 <a:cs typeface="Be Vietnam Pro" pitchFamily="34" charset="-120"/>
               </a:rPr>
-              <a:t> 500</a:t>
+              <a:t> video</a:t>
+            </a:r>
+            <a:r>
+              <a:rPr lang="en-US" sz="2100" dirty="0" spc="-2" kern="0">
+                <a:solidFill>
+                  <a:srgbClr val="6B6A66"/>
+                </a:solidFill>
+                <a:latin typeface="Be Vietnam Pro" pitchFamily="34" charset="0"/>
+                <a:ea typeface="Be Vietnam Pro" pitchFamily="34" charset="-122"/>
+                <a:cs typeface="Be Vietnam Pro" pitchFamily="34" charset="-120"/>
+              </a:rPr>
+              <a:t> công</a:t>
             </a:r>
             <a:r>
               <a:rPr lang="en-US" sz="2100" dirty="0" spc="-1" kern="0">
@@ -15763,10 +15763,10 @@
                 <a:ea typeface="Be Vietnam Pro" pitchFamily="34" charset="-122"/>
                 <a:cs typeface="Be Vietnam Pro" pitchFamily="34" charset="-120"/>
               </a:rPr>
-              <a:t> sub không</a:t>
-            </a:r>
-            <a:r>
-              <a:rPr lang="en-US" sz="2100" dirty="0" spc="10" kern="0">
+              <a:t> khai/90</a:t>
+            </a:r>
+            <a:r>
+              <a:rPr lang="en-US" sz="2100" dirty="0" spc="-16" kern="0">
                 <a:solidFill>
                   <a:srgbClr val="6B6A66"/>
                 </a:solidFill>
@@ -15774,10 +15774,10 @@
                 <a:ea typeface="Be Vietnam Pro" pitchFamily="34" charset="-122"/>
                 <a:cs typeface="Be Vietnam Pro" pitchFamily="34" charset="-120"/>
               </a:rPr>
-              <a:t> đổi</a:t>
-            </a:r>
-            <a:r>
-              <a:rPr lang="en-US" sz="2100" dirty="0" spc="-4" kern="0">
+              <a:t> ngày</a:t>
+            </a:r>
+            <a:r>
+              <a:rPr lang="en-US" sz="2100" dirty="0" spc="-2" kern="0">
                 <a:solidFill>
                   <a:srgbClr val="6B6A66"/>
                 </a:solidFill>
@@ -15799,7 +15799,7 @@
               <a:t> kênh</a:t>
             </a:r>
             <a:r>
-              <a:rPr lang="en-US" sz="2100" dirty="0" spc="13" kern="0">
+              <a:rPr lang="en-US" sz="2100" dirty="0" spc="12" kern="0">
                 <a:solidFill>
                   <a:srgbClr val="6B6A66"/>
                 </a:solidFill>
@@ -15821,6 +15821,17 @@
               <a:t> vào</a:t>
             </a:r>
             <a:r>
+              <a:rPr lang="en-US" sz="2100" dirty="0" spc="0" kern="0">
+                <a:solidFill>
+                  <a:srgbClr val="6B6A66"/>
+                </a:solidFill>
+                <a:latin typeface="Be Vietnam Pro" pitchFamily="34" charset="0"/>
+                <a:ea typeface="Be Vietnam Pro" pitchFamily="34" charset="-122"/>
+                <a:cs typeface="Be Vietnam Pro" pitchFamily="34" charset="-120"/>
+              </a:rPr>
+              <a:t> YPP</a:t>
+            </a:r>
+            <a:r>
               <a:rPr lang="en-US" sz="2100" dirty="0" spc="-1" kern="0">
                 <a:solidFill>
                   <a:srgbClr val="6B6A66"/>
@@ -15829,7 +15840,7 @@
                 <a:ea typeface="Be Vietnam Pro" pitchFamily="34" charset="-122"/>
                 <a:cs typeface="Be Vietnam Pro" pitchFamily="34" charset="-120"/>
               </a:rPr>
-              <a:t> YPP không bị</a:t>
+              <a:t> không</a:t>
             </a:r>
             <a:r>
               <a:rPr lang="en-US" sz="2100" dirty="0" spc="-2" kern="0">
@@ -15840,10 +15851,21 @@
                 <a:ea typeface="Be Vietnam Pro" pitchFamily="34" charset="-122"/>
                 <a:cs typeface="Be Vietnam Pro" pitchFamily="34" charset="-120"/>
               </a:rPr>
+              <a:t> bị</a:t>
+            </a:r>
+            <a:r>
+              <a:rPr lang="en-US" sz="2100" dirty="0" spc="-1" kern="0">
+                <a:solidFill>
+                  <a:srgbClr val="6B6A66"/>
+                </a:solidFill>
+                <a:latin typeface="Be Vietnam Pro" pitchFamily="34" charset="0"/>
+                <a:ea typeface="Be Vietnam Pro" pitchFamily="34" charset="-122"/>
+                <a:cs typeface="Be Vietnam Pro" pitchFamily="34" charset="-120"/>
+              </a:rPr>
               <a:t> ảnh</a:t>
             </a:r>
             <a:r>
-              <a:rPr lang="en-US" sz="2100" dirty="0" spc="4" kern="0">
+              <a:rPr lang="en-US" sz="2100" dirty="0" spc="3" kern="0">
                 <a:solidFill>
                   <a:srgbClr val="6B6A66"/>
                 </a:solidFill>
@@ -16235,7 +16257,62 @@
                 <a:ea typeface="Be Vietnam Pro" pitchFamily="34" charset="-122"/>
                 <a:cs typeface="Be Vietnam Pro" pitchFamily="34" charset="-120"/>
               </a:rPr>
-              <a:t> Nam</a:t>
+              <a:t> Nam (YPP của</a:t>
+            </a:r>
+            <a:r>
+              <a:rPr lang="en-US" sz="2100" dirty="0" spc="-56" kern="0">
+                <a:solidFill>
+                  <a:srgbClr val="6B6A66"/>
+                </a:solidFill>
+                <a:latin typeface="Be Vietnam Pro" pitchFamily="34" charset="0"/>
+                <a:ea typeface="Be Vietnam Pro" pitchFamily="34" charset="-122"/>
+                <a:cs typeface="Be Vietnam Pro" pitchFamily="34" charset="-120"/>
+              </a:rPr>
+              <a:t> YouTube</a:t>
+            </a:r>
+            <a:r>
+              <a:rPr lang="en-US" sz="2100" dirty="0" spc="-3" kern="0">
+                <a:solidFill>
+                  <a:srgbClr val="6B6A66"/>
+                </a:solidFill>
+                <a:latin typeface="Be Vietnam Pro" pitchFamily="34" charset="0"/>
+                <a:ea typeface="Be Vietnam Pro" pitchFamily="34" charset="-122"/>
+                <a:cs typeface="Be Vietnam Pro" pitchFamily="34" charset="-120"/>
+              </a:rPr>
+              <a:t> có mở</a:t>
+            </a:r>
+            <a:r>
+              <a:rPr lang="en-US" sz="2100" dirty="0" spc="-2" kern="0">
+                <a:solidFill>
+                  <a:srgbClr val="6B6A66"/>
+                </a:solidFill>
+                <a:latin typeface="Be Vietnam Pro" pitchFamily="34" charset="0"/>
+                <a:ea typeface="Be Vietnam Pro" pitchFamily="34" charset="-122"/>
+                <a:cs typeface="Be Vietnam Pro" pitchFamily="34" charset="-120"/>
+              </a:rPr>
+              <a:t> cho</a:t>
+            </a:r>
+            <a:r>
+              <a:rPr lang="en-US" sz="2100" dirty="0" spc="-5" kern="0">
+                <a:solidFill>
+                  <a:srgbClr val="6B6A66"/>
+                </a:solidFill>
+                <a:latin typeface="Be Vietnam Pro" pitchFamily="34" charset="0"/>
+                <a:ea typeface="Be Vietnam Pro" pitchFamily="34" charset="-122"/>
+                <a:cs typeface="Be Vietnam Pro" pitchFamily="34" charset="-120"/>
+              </a:rPr>
+              <a:t> Việt</a:t>
+            </a:r>
+            <a:r>
+              <a:rPr lang="en-US" sz="2100" dirty="0" spc="-2" kern="0">
+                <a:solidFill>
+                  <a:srgbClr val="6B6A66"/>
+                </a:solidFill>
+                <a:latin typeface="Be Vietnam Pro" pitchFamily="34" charset="0"/>
+                <a:ea typeface="Be Vietnam Pro" pitchFamily="34" charset="-122"/>
+                <a:cs typeface="Be Vietnam Pro" pitchFamily="34" charset="-120"/>
+              </a:rPr>
+              <a:t> Nam)</a:t>
             </a:r>
             <a:endParaRPr lang="en-US" sz="2100" dirty="0"/>
           </a:p>

--- a/research/xu-huong-kiem-tien-youtube-tiktok-facebook.pptx
+++ b/research/xu-huong-kiem-tien-youtube-tiktok-facebook.pptx
@@ -9257,7 +9257,7 @@
                 <a:ea typeface="Be Vietnam Pro" pitchFamily="34" charset="-122"/>
                 <a:cs typeface="Be Vietnam Pro" pitchFamily="34" charset="-120"/>
               </a:rPr>
-              <a:t> 8.000</a:t>
+              <a:t> 1.000 sub + 8.000</a:t>
             </a:r>
             <a:r>
               <a:rPr lang="en-US" sz="2700" dirty="0" spc="-2" kern="0">
@@ -9271,26 +9271,15 @@
               <a:t> giờ</a:t>
             </a:r>
             <a:r>
-              <a:rPr lang="en-US" sz="2700" dirty="0" spc="-4" kern="0">
-                <a:solidFill>
-                  <a:srgbClr val="14161C"/>
-                </a:solidFill>
-                <a:latin typeface="Be Vietnam Pro" pitchFamily="34" charset="0"/>
-                <a:ea typeface="Be Vietnam Pro" pitchFamily="34" charset="-122"/>
-                <a:cs typeface="Be Vietnam Pro" pitchFamily="34" charset="-120"/>
-              </a:rPr>
-              <a:t> hoặc</a:t>
-            </a:r>
-            <a:r>
-              <a:rPr lang="en-US" sz="2700" dirty="0" spc="-2" kern="0">
-                <a:solidFill>
-                  <a:srgbClr val="14161C"/>
-                </a:solidFill>
-                <a:latin typeface="Be Vietnam Pro" pitchFamily="34" charset="0"/>
-                <a:ea typeface="Be Vietnam Pro" pitchFamily="34" charset="-122"/>
-                <a:cs typeface="Be Vietnam Pro" pitchFamily="34" charset="-120"/>
-              </a:rPr>
-              <a:t> 20</a:t>
+              <a:rPr lang="en-US" sz="2700" dirty="0" spc="-3" kern="0">
+                <a:solidFill>
+                  <a:srgbClr val="14161C"/>
+                </a:solidFill>
+                <a:latin typeface="Be Vietnam Pro" pitchFamily="34" charset="0"/>
+                <a:ea typeface="Be Vietnam Pro" pitchFamily="34" charset="-122"/>
+                <a:cs typeface="Be Vietnam Pro" pitchFamily="34" charset="-120"/>
+              </a:rPr>
+              <a:t> hoặc 20</a:t>
             </a:r>
             <a:r>
               <a:rPr lang="en-US" sz="2700" dirty="0" spc="8" kern="0">
@@ -15562,7 +15551,7 @@
               <a:buNone/>
             </a:pPr>
             <a:r>
-              <a:rPr lang="en-US" sz="2700" b="1" dirty="0" spc="13" kern="0">
+              <a:rPr lang="en-US" sz="2550" b="1" dirty="0" spc="14" kern="0">
                 <a:solidFill>
                   <a:srgbClr val="14161C"/>
                 </a:solidFill>
@@ -15573,7 +15562,7 @@
               <a:t>Người</a:t>
             </a:r>
             <a:r>
-              <a:rPr lang="en-US" sz="2700" b="1" dirty="0" spc="1" kern="0">
+              <a:rPr lang="en-US" sz="2550" b="1" dirty="0" spc="3" kern="0">
                 <a:solidFill>
                   <a:srgbClr val="14161C"/>
                 </a:solidFill>
@@ -15584,18 +15573,29 @@
               <a:t> mới:</a:t>
             </a:r>
             <a:r>
-              <a:rPr lang="en-US" sz="2700" b="1" dirty="0" spc="2" kern="0">
-                <a:solidFill>
-                  <a:srgbClr val="14161C"/>
-                </a:solidFill>
-                <a:latin typeface="Be Vietnam Pro" pitchFamily="34" charset="0"/>
-                <a:ea typeface="Be Vietnam Pro" pitchFamily="34" charset="-122"/>
-                <a:cs typeface="Be Vietnam Pro" pitchFamily="34" charset="-120"/>
-              </a:rPr>
-              <a:t> 8.000</a:t>
-            </a:r>
-            <a:r>
-              <a:rPr lang="en-US" sz="2700" b="1" dirty="0" spc="0" kern="0">
+              <a:rPr lang="en-US" sz="2550" b="1" dirty="0" spc="-1" kern="0">
+                <a:solidFill>
+                  <a:srgbClr val="14161C"/>
+                </a:solidFill>
+                <a:latin typeface="Be Vietnam Pro" pitchFamily="34" charset="0"/>
+                <a:ea typeface="Be Vietnam Pro" pitchFamily="34" charset="-122"/>
+                <a:cs typeface="Be Vietnam Pro" pitchFamily="34" charset="-120"/>
+              </a:rPr>
+              <a:t> 1.000 sub</a:t>
+            </a:r>
+            <a:r>
+              <a:rPr lang="en-US" sz="2550" b="1" dirty="0" spc="0" kern="0">
+                <a:solidFill>
+                  <a:srgbClr val="14161C"/>
+                </a:solidFill>
+                <a:latin typeface="Be Vietnam Pro" pitchFamily="34" charset="0"/>
+                <a:ea typeface="Be Vietnam Pro" pitchFamily="34" charset="-122"/>
+                <a:cs typeface="Be Vietnam Pro" pitchFamily="34" charset="-120"/>
+              </a:rPr>
+              <a:t> + 8.000</a:t>
+            </a:r>
+            <a:r>
+              <a:rPr lang="en-US" sz="2550" b="1" dirty="0" spc="3" kern="0">
                 <a:solidFill>
                   <a:srgbClr val="14161C"/>
                 </a:solidFill>
@@ -15606,7 +15606,7 @@
               <a:t> giờ</a:t>
             </a:r>
             <a:r>
-              <a:rPr lang="en-US" sz="2700" b="1" dirty="0" spc="-2" kern="0">
+              <a:rPr lang="en-US" sz="2550" b="1" dirty="0" spc="-1" kern="0">
                 <a:solidFill>
                   <a:srgbClr val="14161C"/>
                 </a:solidFill>
@@ -15617,7 +15617,7 @@
               <a:t> hoặc</a:t>
             </a:r>
             <a:r>
-              <a:rPr lang="en-US" sz="2700" b="1" dirty="0" spc="1" kern="0">
+              <a:rPr lang="en-US" sz="2550" b="1" dirty="0" spc="1" kern="0">
                 <a:solidFill>
                   <a:srgbClr val="14161C"/>
                 </a:solidFill>
@@ -15628,7 +15628,7 @@
               <a:t> 20</a:t>
             </a:r>
             <a:r>
-              <a:rPr lang="en-US" sz="2700" b="1" dirty="0" spc="5" kern="0">
+              <a:rPr lang="en-US" sz="2550" b="1" dirty="0" spc="6" kern="0">
                 <a:solidFill>
                   <a:srgbClr val="14161C"/>
                 </a:solidFill>
@@ -15639,7 +15639,7 @@
               <a:t> triệu</a:t>
             </a:r>
             <a:r>
-              <a:rPr lang="en-US" sz="2700" b="1" dirty="0" spc="-1" kern="0">
+              <a:rPr lang="en-US" sz="2550" b="1" dirty="0" spc="-1" kern="0">
                 <a:solidFill>
                   <a:srgbClr val="14161C"/>
                 </a:solidFill>
@@ -15650,7 +15650,7 @@
               <a:t> Shorts/90</a:t>
             </a:r>
             <a:r>
-              <a:rPr lang="en-US" sz="2700" b="1" dirty="0" spc="-12" kern="0">
+              <a:rPr lang="en-US" sz="2550" b="1" dirty="0" spc="-11" kern="0">
                 <a:solidFill>
                   <a:srgbClr val="14161C"/>
                 </a:solidFill>
@@ -15660,7 +15660,7 @@
               </a:rPr>
               <a:t> ngày</a:t>
             </a:r>
-            <a:endParaRPr lang="en-US" sz="2700" dirty="0"/>
+            <a:endParaRPr lang="en-US" sz="2550" dirty="0"/>
           </a:p>
         </p:txBody>
       </p:sp>

--- a/research/xu-huong-kiem-tien-youtube-tiktok-facebook.pptx
+++ b/research/xu-huong-kiem-tien-youtube-tiktok-facebook.pptx
@@ -16100,15 +16100,15 @@
               <a:t> video</a:t>
             </a:r>
             <a:r>
-              <a:rPr lang="en-US" sz="2700" b="1" dirty="0" spc="-17" kern="0">
-                <a:solidFill>
-                  <a:srgbClr val="14161C"/>
-                </a:solidFill>
-                <a:latin typeface="Be Vietnam Pro" pitchFamily="34" charset="0"/>
-                <a:ea typeface="Be Vietnam Pro" pitchFamily="34" charset="-122"/>
-                <a:cs typeface="Be Vietnam Pro" pitchFamily="34" charset="-120"/>
-              </a:rPr>
-              <a:t> trên</a:t>
+              <a:rPr lang="en-US" sz="2700" b="1" dirty="0" spc="-5" kern="0">
+                <a:solidFill>
+                  <a:srgbClr val="14161C"/>
+                </a:solidFill>
+                <a:latin typeface="Be Vietnam Pro" pitchFamily="34" charset="0"/>
+                <a:ea typeface="Be Vietnam Pro" pitchFamily="34" charset="-122"/>
+                <a:cs typeface="Be Vietnam Pro" pitchFamily="34" charset="-120"/>
+              </a:rPr>
+              <a:t> từ</a:t>
             </a:r>
             <a:r>
               <a:rPr lang="en-US" sz="2700" b="1" dirty="0" spc="-1" kern="0">
